--- a/Topic_D/Exam_Practice/TD-L02_Speaking_Workshop_The_Classroom_and_Learning_Tools.pptx
+++ b/Topic_D/Exam_Practice/TD-L02_Speaking_Workshop_The_Classroom_and_Learning_Tools.pptx
@@ -615,7 +615,11 @@
           <a:lstStyle/>
           <a:p>
             <a:r>
-              <a:rPr lang="en-US" dirty="0"/>
+              <a:rPr lang="ar-SA" dirty="0">
+                <a:latin typeface="Amiri" pitchFamily="2" charset="-78"/>
+                <a:ea typeface="Amiri" pitchFamily="2" charset="-78"/>
+                <a:cs typeface="Amiri" pitchFamily="2" charset="-78"/>
+              </a:rPr>
               <a:t>ROLE PLAY C (Develop) — a new student.
 SET-UP IN THE BREAKOUT ROOM: A = examiner (reads the left column ONLY — the questions, in order), B = candidate (sees the task column; Core may use the help column), C = observer (ticks the feedback checklist). 1 minute preparation, about 3 minutes speaking, 1 minute feedback, then rotate.
 Task ! is the unexpected question: in the exam the candidate has not seen it — the examiner should read it without warning.
@@ -707,7 +711,11 @@
           <a:lstStyle/>
           <a:p>
             <a:r>
-              <a:rPr lang="en-US" dirty="0"/>
+              <a:rPr lang="ar-SA" dirty="0">
+                <a:latin typeface="Amiri" pitchFamily="2" charset="-78"/>
+                <a:ea typeface="Amiri" pitchFamily="2" charset="-78"/>
+                <a:cs typeface="Amiri" pitchFamily="2" charset="-78"/>
+              </a:rPr>
               <a:t>ROLE PLAY D (Stretch) — a student council.
 SET-UP IN THE BREAKOUT ROOM: A = examiner (reads the left column ONLY — the questions, in order), B = candidate (sees the task column; Core may use the help column), C = observer (ticks the feedback checklist). 1 minute preparation, about 3 minutes speaking, 1 minute feedback, then rotate.
 Task ! is the unexpected question: in the exam the candidate has not seen it — the examiner should read it without warning.
@@ -1243,7 +1251,11 @@
           <a:lstStyle/>
           <a:p>
             <a:r>
-              <a:rPr lang="en-US" dirty="0"/>
+              <a:rPr lang="ar-SA" dirty="0">
+                <a:latin typeface="Amiri" pitchFamily="2" charset="-78"/>
+                <a:ea typeface="Amiri" pitchFamily="2" charset="-78"/>
+                <a:cs typeface="Amiri" pitchFamily="2" charset="-78"/>
+              </a:rPr>
               <a:t>TOPIC CONVERSATION — Core. Examiner asks the questions in order and may add “لِمَاذَا؟ / هَلْ يُمْكِنُ أَنْ تَشْرَحَ أَكْثَرَ؟” to push for more. Candidate aims for one full sentence per question.
 </a:t>
             </a:r>
@@ -1332,7 +1344,11 @@
           <a:lstStyle/>
           <a:p>
             <a:r>
-              <a:rPr lang="en-US" dirty="0"/>
+              <a:rPr lang="ar-SA" dirty="0">
+                <a:latin typeface="Amiri" pitchFamily="2" charset="-78"/>
+                <a:ea typeface="Amiri" pitchFamily="2" charset="-78"/>
+                <a:cs typeface="Amiri" pitchFamily="2" charset="-78"/>
+              </a:rPr>
               <a:t>TOPIC CONVERSATION — Develop. Examiner asks the questions in order and may add “لِمَاذَا؟ / هَلْ يُمْكِنُ أَنْ تَشْرَحَ أَكْثَرَ؟” to push for more. Candidate aims for two or three sentences, with a relative clause and a past detail.
 </a:t>
             </a:r>
@@ -1421,7 +1437,11 @@
           <a:lstStyle/>
           <a:p>
             <a:r>
-              <a:rPr lang="en-US" dirty="0"/>
+              <a:rPr lang="ar-SA" dirty="0">
+                <a:latin typeface="Amiri" pitchFamily="2" charset="-78"/>
+                <a:ea typeface="Amiri" pitchFamily="2" charset="-78"/>
+                <a:cs typeface="Amiri" pitchFamily="2" charset="-78"/>
+              </a:rPr>
               <a:t>TOPIC CONVERSATION — Stretch. Examiner asks the questions in order and may add “لِمَاذَا؟ / هَلْ يُمْكِنُ أَنْ تَشْرَحَ أَكْثَرَ؟” to push for more. Candidate aims for a developed answer: opinion, balance, concession and a conditional.
 </a:t>
             </a:r>
@@ -1510,7 +1530,11 @@
           <a:lstStyle/>
           <a:p>
             <a:r>
-              <a:rPr lang="en-US" dirty="0"/>
+              <a:rPr lang="ar-SA" dirty="0">
+                <a:latin typeface="Amiri" pitchFamily="2" charset="-78"/>
+                <a:ea typeface="Amiri" pitchFamily="2" charset="-78"/>
+                <a:cs typeface="Amiri" pitchFamily="2" charset="-78"/>
+              </a:rPr>
               <a:t>WELCOME (1 min) — while students join.
 • Greet each student by name as they arrive: السَّلَامُ عَلَيْكُمْ. Take the register (Pastoral Tracker: attendance 0/1).
 • 2-MINUTE CHECK-IN (SEND training): a private chat to any student who seemed unsettled last lesson — “Are you okay today? 👍 / 👎”.
@@ -2224,7 +2248,11 @@
           <a:lstStyle/>
           <a:p>
             <a:r>
-              <a:rPr lang="en-US" dirty="0"/>
+              <a:rPr lang="ar-SA" dirty="0">
+                <a:latin typeface="Amiri" pitchFamily="2" charset="-78"/>
+                <a:ea typeface="Amiri" pitchFamily="2" charset="-78"/>
+                <a:cs typeface="Amiri" pitchFamily="2" charset="-78"/>
+              </a:rPr>
               <a:t>TEACH (3 min). Role play = precise and complete; conversation = develop. Choral repetition of the repair phrases. To a girl: تُعِيدِي.</a:t>
             </a:r>
             <a:endParaRPr lang="en-US" dirty="0"/>
@@ -2312,7 +2340,11 @@
           <a:lstStyle/>
           <a:p>
             <a:r>
-              <a:rPr lang="en-US" dirty="0"/>
+              <a:rPr lang="ar-SA" dirty="0">
+                <a:latin typeface="Amiri" pitchFamily="2" charset="-78"/>
+                <a:ea typeface="Amiri" pitchFamily="2" charset="-78"/>
+                <a:cs typeface="Amiri" pitchFamily="2" charset="-78"/>
+              </a:rPr>
               <a:t>LANGUAGE BANK (2 min) — يُوجَدُ + masculine: يُوجَدُ حَاسُوبٌ. تُوجَدُ + feminine OR non-human plural: تُوجَدُ سَبُّورَةٌ ذَكِيَّةٌ · تُوجَدُ كُتُبٌ كَثِيرَةٌ. Negative: لَا يُوجَدُ / لَا تُوجَدُ.</a:t>
             </a:r>
             <a:endParaRPr lang="en-US" dirty="0"/>
@@ -2400,7 +2432,11 @@
           <a:lstStyle/>
           <a:p>
             <a:r>
-              <a:rPr lang="en-US" dirty="0"/>
+              <a:rPr lang="ar-SA" dirty="0">
+                <a:latin typeface="Amiri" pitchFamily="2" charset="-78"/>
+                <a:ea typeface="Amiri" pitchFamily="2" charset="-78"/>
+                <a:cs typeface="Amiri" pitchFamily="2" charset="-78"/>
+              </a:rPr>
               <a:t>LANGUAGE BANK (2 min) — هٰذَا القَلَمُ · هٰذِهِ المِسْطَرَةُ · هٰذِهِ الكُتُبُ (non-human pl. → هٰذِهِ). Relative + returning pronoun: السَّبُّورَةُ الَّتِي نَكْتُبُ عَلَيْهَا · الحَاسُوبُ الَّذِي نَسْتَخْدِمُهُ.</a:t>
             </a:r>
             <a:endParaRPr lang="en-US" dirty="0"/>
@@ -2576,7 +2612,11 @@
           <a:lstStyle/>
           <a:p>
             <a:r>
-              <a:rPr lang="en-US" dirty="0"/>
+              <a:rPr lang="ar-SA" dirty="0">
+                <a:latin typeface="Amiri" pitchFamily="2" charset="-78"/>
+                <a:ea typeface="Amiri" pitchFamily="2" charset="-78"/>
+                <a:cs typeface="Amiri" pitchFamily="2" charset="-78"/>
+              </a:rPr>
               <a:t>ROLE PLAY A (Core) — a school stationery shop.
 SET-UP IN THE BREAKOUT ROOM: A = examiner (reads the left column ONLY — the questions, in order), B = candidate (sees the task column; Core may use the help column), C = observer (ticks the feedback checklist). 1 minute preparation, about 3 minutes speaking, 1 minute feedback, then rotate.
 Task ! is the unexpected question: in the exam the candidate has not seen it — the examiner should read it without warning.
@@ -2668,7 +2708,11 @@
           <a:lstStyle/>
           <a:p>
             <a:r>
-              <a:rPr lang="en-US" dirty="0"/>
+              <a:rPr lang="ar-SA" dirty="0">
+                <a:latin typeface="Amiri" pitchFamily="2" charset="-78"/>
+                <a:ea typeface="Amiri" pitchFamily="2" charset="-78"/>
+                <a:cs typeface="Amiri" pitchFamily="2" charset="-78"/>
+              </a:rPr>
               <a:t>ROLE PLAY B (Core+) — showing a visitor round.
 SET-UP IN THE BREAKOUT ROOM: A = examiner (reads the left column ONLY — the questions, in order), B = candidate (sees the task column; Core may use the help column), C = observer (ticks the feedback checklist). 1 minute preparation, about 3 minutes speaking, 1 minute feedback, then rotate.
 Task ! is the unexpected question: in the exam the candidate has not seen it — the examiner should read it without warning.
@@ -3156,6 +3200,7 @@
                   <a:srgbClr val="D4AF37"/>
                 </a:solidFill>
                 <a:latin typeface="Amiri" pitchFamily="2" charset="-78"/>
+                <a:ea typeface="Amiri" pitchFamily="2" charset="-78"/>
                 <a:cs typeface="Amiri" pitchFamily="2" charset="-78"/>
               </a:rPr>
               <a:t>م</a:t>
@@ -3362,6 +3407,7 @@
                   <a:srgbClr val="D4AF37"/>
                 </a:solidFill>
                 <a:latin typeface="Amiri" pitchFamily="2" charset="-78"/>
+                <a:ea typeface="Amiri" pitchFamily="2" charset="-78"/>
                 <a:cs typeface="Amiri" pitchFamily="2" charset="-78"/>
               </a:rPr>
               <a:t>وَرْشَةُ التَّحَدُّثِ — الفَصْلُ وَأَدَوَاتُ التَّعَلُّمِ</a:t>
@@ -3413,6 +3459,7 @@
                   <a:srgbClr val="C6D2E6"/>
                 </a:solidFill>
                 <a:latin typeface="Amiri" pitchFamily="2" charset="-78"/>
+                <a:ea typeface="Amiri" pitchFamily="2" charset="-78"/>
                 <a:cs typeface="Amiri" pitchFamily="2" charset="-78"/>
               </a:rPr>
               <a:t>يُوجَدُ</a:t>
@@ -3439,6 +3486,7 @@
                   <a:srgbClr val="C6D2E6"/>
                 </a:solidFill>
                 <a:latin typeface="Amiri" pitchFamily="2" charset="-78"/>
+                <a:ea typeface="Amiri" pitchFamily="2" charset="-78"/>
                 <a:cs typeface="Amiri" pitchFamily="2" charset="-78"/>
               </a:rPr>
               <a:t>تُوجَدُ</a:t>
@@ -3465,6 +3513,7 @@
                   <a:srgbClr val="C6D2E6"/>
                 </a:solidFill>
                 <a:latin typeface="Amiri" pitchFamily="2" charset="-78"/>
+                <a:ea typeface="Amiri" pitchFamily="2" charset="-78"/>
                 <a:cs typeface="Amiri" pitchFamily="2" charset="-78"/>
               </a:rPr>
               <a:t>هٰذَا</a:t>
@@ -3491,6 +3540,7 @@
                   <a:srgbClr val="C6D2E6"/>
                 </a:solidFill>
                 <a:latin typeface="Amiri" pitchFamily="2" charset="-78"/>
+                <a:ea typeface="Amiri" pitchFamily="2" charset="-78"/>
                 <a:cs typeface="Amiri" pitchFamily="2" charset="-78"/>
               </a:rPr>
               <a:t>هٰذِهِ</a:t>
@@ -3517,6 +3567,7 @@
                   <a:srgbClr val="C6D2E6"/>
                 </a:solidFill>
                 <a:latin typeface="Amiri" pitchFamily="2" charset="-78"/>
+                <a:ea typeface="Amiri" pitchFamily="2" charset="-78"/>
                 <a:cs typeface="Amiri" pitchFamily="2" charset="-78"/>
               </a:rPr>
               <a:t>الَّذِي نَسْتَخْدِمُهُ لِلْبَحْثِ</a:t>
@@ -3949,6 +4000,7 @@
                   <a:srgbClr val="D4AF37"/>
                 </a:solidFill>
                 <a:latin typeface="Amiri" pitchFamily="2" charset="-78"/>
+                <a:ea typeface="Amiri" pitchFamily="2" charset="-78"/>
                 <a:cs typeface="Amiri" pitchFamily="2" charset="-78"/>
               </a:rPr>
               <a:t>م</a:t>
@@ -4269,6 +4321,7 @@
                   <a:srgbClr val="8A6D1E"/>
                 </a:solidFill>
                 <a:latin typeface="Amiri" pitchFamily="2" charset="-78"/>
+                <a:ea typeface="Amiri" pitchFamily="2" charset="-78"/>
                 <a:cs typeface="Amiri" pitchFamily="2" charset="-78"/>
               </a:rPr>
               <a:t>مُسَاعَدَةُ طَالِبٍ جَدِيدٍ</a:t>
@@ -4549,6 +4602,7 @@
                   <a:srgbClr val="1B3B6F"/>
                 </a:solidFill>
                 <a:latin typeface="Amiri" pitchFamily="2" charset="-78"/>
+                <a:ea typeface="Amiri" pitchFamily="2" charset="-78"/>
                 <a:cs typeface="Amiri" pitchFamily="2" charset="-78"/>
               </a:rPr>
               <a:t>عَلَى المِنَصَّةِ الَّتِي …</a:t>
@@ -4625,6 +4679,7 @@
                   <a:srgbClr val="1B3B6F"/>
                 </a:solidFill>
                 <a:latin typeface="Amiri" pitchFamily="2" charset="-78"/>
+                <a:ea typeface="Amiri" pitchFamily="2" charset="-78"/>
                 <a:cs typeface="Amiri" pitchFamily="2" charset="-78"/>
               </a:rPr>
               <a:t>كَيْفَ أَعْرِفُ الوَاجِبَاتِ؟</a:t>
@@ -4728,6 +4783,7 @@
                   <a:srgbClr val="1B3B6F"/>
                 </a:solidFill>
                 <a:latin typeface="Amiri" pitchFamily="2" charset="-78"/>
+                <a:ea typeface="Amiri" pitchFamily="2" charset="-78"/>
                 <a:cs typeface="Amiri" pitchFamily="2" charset="-78"/>
               </a:rPr>
               <a:t>ارْفَعْ … / لَا تَأْكُلْ …</a:t>
@@ -4804,6 +4860,7 @@
                   <a:srgbClr val="1B3B6F"/>
                 </a:solidFill>
                 <a:latin typeface="Amiri" pitchFamily="2" charset="-78"/>
+                <a:ea typeface="Amiri" pitchFamily="2" charset="-78"/>
                 <a:cs typeface="Amiri" pitchFamily="2" charset="-78"/>
               </a:rPr>
               <a:t>وَمَا القَوَاعِدُ المُهِمَّةُ فِي الفَصْلِ؟</a:t>
@@ -4907,6 +4964,7 @@
                   <a:srgbClr val="1B3B6F"/>
                 </a:solidFill>
                 <a:latin typeface="Amiri" pitchFamily="2" charset="-78"/>
+                <a:ea typeface="Amiri" pitchFamily="2" charset="-78"/>
                 <a:cs typeface="Amiri" pitchFamily="2" charset="-78"/>
               </a:rPr>
               <a:t>فِي يَوْمِي الأَوَّلِ …</a:t>
@@ -4983,6 +5041,7 @@
                   <a:srgbClr val="1B3B6F"/>
                 </a:solidFill>
                 <a:latin typeface="Amiri" pitchFamily="2" charset="-78"/>
+                <a:ea typeface="Amiri" pitchFamily="2" charset="-78"/>
                 <a:cs typeface="Amiri" pitchFamily="2" charset="-78"/>
               </a:rPr>
               <a:t>كَيْفَ كَانَ يَوْمُكَ الأَوَّلُ هُنَا؟</a:t>
@@ -5086,6 +5145,7 @@
                   <a:srgbClr val="1B3B6F"/>
                 </a:solidFill>
                 <a:latin typeface="Amiri" pitchFamily="2" charset="-78"/>
+                <a:ea typeface="Amiri" pitchFamily="2" charset="-78"/>
                 <a:cs typeface="Amiri" pitchFamily="2" charset="-78"/>
               </a:rPr>
               <a:t>الحَاسُوبُ أَسْرَعُ، لٰكِنَّ الدَّفْتَرَ …</a:t>
@@ -5162,6 +5222,7 @@
                   <a:srgbClr val="1B3B6F"/>
                 </a:solidFill>
                 <a:latin typeface="Amiri" pitchFamily="2" charset="-78"/>
+                <a:ea typeface="Amiri" pitchFamily="2" charset="-78"/>
                 <a:cs typeface="Amiri" pitchFamily="2" charset="-78"/>
               </a:rPr>
               <a:t>هَلِ الحَاسُوبُ أَفْضَلُ مِنَ الدَّفْتَرِ؟</a:t>
@@ -5265,6 +5326,7 @@
                   <a:srgbClr val="1B3B6F"/>
                 </a:solidFill>
                 <a:latin typeface="Amiri" pitchFamily="2" charset="-78"/>
+                <a:ea typeface="Amiri" pitchFamily="2" charset="-78"/>
                 <a:cs typeface="Amiri" pitchFamily="2" charset="-78"/>
               </a:rPr>
               <a:t>طَبْعًا، سَنَدْرُسُ مَعًا …</a:t>
@@ -5341,6 +5403,7 @@
                   <a:srgbClr val="1B3B6F"/>
                 </a:solidFill>
                 <a:latin typeface="Amiri" pitchFamily="2" charset="-78"/>
+                <a:ea typeface="Amiri" pitchFamily="2" charset="-78"/>
                 <a:cs typeface="Amiri" pitchFamily="2" charset="-78"/>
               </a:rPr>
               <a:t>هَلْ سَتُسَاعِدُنِي فِي الرِّيَاضِيَّاتِ؟</a:t>
@@ -5550,6 +5613,7 @@
                   <a:srgbClr val="D4AF37"/>
                 </a:solidFill>
                 <a:latin typeface="Amiri" pitchFamily="2" charset="-78"/>
+                <a:ea typeface="Amiri" pitchFamily="2" charset="-78"/>
                 <a:cs typeface="Amiri" pitchFamily="2" charset="-78"/>
               </a:rPr>
               <a:t>م</a:t>
@@ -5870,6 +5934,7 @@
                   <a:srgbClr val="8A6D1E"/>
                 </a:solidFill>
                 <a:latin typeface="Amiri" pitchFamily="2" charset="-78"/>
+                <a:ea typeface="Amiri" pitchFamily="2" charset="-78"/>
                 <a:cs typeface="Amiri" pitchFamily="2" charset="-78"/>
               </a:rPr>
               <a:t>حَاسُوبٌ لَوْحِيٌّ لِكُلِّ طَالِبٍ؟</a:t>
@@ -6150,6 +6215,7 @@
                   <a:srgbClr val="1B3B6F"/>
                 </a:solidFill>
                 <a:latin typeface="Amiri" pitchFamily="2" charset="-78"/>
+                <a:ea typeface="Amiri" pitchFamily="2" charset="-78"/>
                 <a:cs typeface="Amiri" pitchFamily="2" charset="-78"/>
               </a:rPr>
               <a:t>أَوَّلًا … ثَانِيًا …</a:t>
@@ -6226,6 +6292,7 @@
                   <a:srgbClr val="1B3B6F"/>
                 </a:solidFill>
                 <a:latin typeface="Amiri" pitchFamily="2" charset="-78"/>
+                <a:ea typeface="Amiri" pitchFamily="2" charset="-78"/>
                 <a:cs typeface="Amiri" pitchFamily="2" charset="-78"/>
               </a:rPr>
               <a:t>تَقْتَرِحُ أَنْ يَحْصُلَ كُلُّ طَالِبٍ عَلَى حَاسُوبٍ لَوْحِيٍّ. لِمَاذَا؟</a:t>
@@ -6329,6 +6396,7 @@
                   <a:srgbClr val="1B3B6F"/>
                 </a:solidFill>
                 <a:latin typeface="Amiri" pitchFamily="2" charset="-78"/>
+                <a:ea typeface="Amiri" pitchFamily="2" charset="-78"/>
                 <a:cs typeface="Amiri" pitchFamily="2" charset="-78"/>
               </a:rPr>
               <a:t>صَحِيحٌ أَنَّ … غَيْرَ أَنَّ …</a:t>
@@ -6405,6 +6473,7 @@
                   <a:srgbClr val="1B3B6F"/>
                 </a:solidFill>
                 <a:latin typeface="Amiri" pitchFamily="2" charset="-78"/>
+                <a:ea typeface="Amiri" pitchFamily="2" charset="-78"/>
                 <a:cs typeface="Amiri" pitchFamily="2" charset="-78"/>
               </a:rPr>
               <a:t>لٰكِنَّ الطُّلَّابَ سَيَلْعَبُونَ بِهَا!</a:t>
@@ -6508,6 +6577,7 @@
                   <a:srgbClr val="1B3B6F"/>
                 </a:solidFill>
                 <a:latin typeface="Amiri" pitchFamily="2" charset="-78"/>
+                <a:ea typeface="Amiri" pitchFamily="2" charset="-78"/>
                 <a:cs typeface="Amiri" pitchFamily="2" charset="-78"/>
               </a:rPr>
               <a:t>نَعَمْ، فِي … حَيْثُ وُزِّعَتْ … فَتَحَسَّنَتْ …</a:t>
@@ -6584,6 +6654,7 @@
                   <a:srgbClr val="1B3B6F"/>
                 </a:solidFill>
                 <a:latin typeface="Amiri" pitchFamily="2" charset="-78"/>
+                <a:ea typeface="Amiri" pitchFamily="2" charset="-78"/>
                 <a:cs typeface="Amiri" pitchFamily="2" charset="-78"/>
               </a:rPr>
               <a:t>هَلْ جُرِّبَتْ هٰذِهِ الفِكْرَةُ مِنْ قَبْلُ؟</a:t>
@@ -6687,6 +6758,7 @@
                   <a:srgbClr val="1B3B6F"/>
                 </a:solidFill>
                 <a:latin typeface="Amiri" pitchFamily="2" charset="-78"/>
+                <a:ea typeface="Amiri" pitchFamily="2" charset="-78"/>
                 <a:cs typeface="Amiri" pitchFamily="2" charset="-78"/>
               </a:rPr>
               <a:t>مِنْ نَاحِيَةٍ … وَمِنْ نَاحِيَةٍ أُخْرَى …</a:t>
@@ -6763,6 +6835,7 @@
                   <a:srgbClr val="1B3B6F"/>
                 </a:solidFill>
                 <a:latin typeface="Amiri" pitchFamily="2" charset="-78"/>
+                <a:ea typeface="Amiri" pitchFamily="2" charset="-78"/>
                 <a:cs typeface="Amiri" pitchFamily="2" charset="-78"/>
               </a:rPr>
               <a:t>وَمَاذَا عَنِ الطُّلَّابِ الَّذِينَ يُفَضِّلُونَ الوَرَقَ؟</a:t>
@@ -6866,6 +6939,7 @@
                   <a:srgbClr val="1B3B6F"/>
                 </a:solidFill>
                 <a:latin typeface="Amiri" pitchFamily="2" charset="-78"/>
+                <a:ea typeface="Amiri" pitchFamily="2" charset="-78"/>
                 <a:cs typeface="Amiri" pitchFamily="2" charset="-78"/>
               </a:rPr>
               <a:t>لَوْ رَفَضَتْ، لَاقْتَرَحْنَا …</a:t>
@@ -6942,6 +7016,7 @@
                   <a:srgbClr val="1B3B6F"/>
                 </a:solidFill>
                 <a:latin typeface="Amiri" pitchFamily="2" charset="-78"/>
+                <a:ea typeface="Amiri" pitchFamily="2" charset="-78"/>
                 <a:cs typeface="Amiri" pitchFamily="2" charset="-78"/>
               </a:rPr>
               <a:t>لَوْ رَفَضَتِ الإِدَارَةُ، مَاذَا تَفْعَلُونَ؟</a:t>
@@ -7151,6 +7226,7 @@
                   <a:srgbClr val="D4AF37"/>
                 </a:solidFill>
                 <a:latin typeface="Amiri" pitchFamily="2" charset="-78"/>
+                <a:ea typeface="Amiri" pitchFamily="2" charset="-78"/>
                 <a:cs typeface="Amiri" pitchFamily="2" charset="-78"/>
               </a:rPr>
               <a:t>م</a:t>
@@ -7471,6 +7547,7 @@
                   <a:srgbClr val="8A6D1E"/>
                 </a:solidFill>
                 <a:latin typeface="Amiri" pitchFamily="2" charset="-78"/>
+                <a:ea typeface="Amiri" pitchFamily="2" charset="-78"/>
                 <a:cs typeface="Amiri" pitchFamily="2" charset="-78"/>
               </a:rPr>
               <a:t>وَرَقَةُ المُلَاحِظِ</a:t>
@@ -8941,6 +9018,7 @@
                   <a:srgbClr val="D4AF37"/>
                 </a:solidFill>
                 <a:latin typeface="Amiri" pitchFamily="2" charset="-78"/>
+                <a:ea typeface="Amiri" pitchFamily="2" charset="-78"/>
                 <a:cs typeface="Amiri" pitchFamily="2" charset="-78"/>
               </a:rPr>
               <a:t>م</a:t>
@@ -9261,6 +9339,7 @@
                   <a:srgbClr val="8A6D1E"/>
                 </a:solidFill>
                 <a:latin typeface="Amiri" pitchFamily="2" charset="-78"/>
+                <a:ea typeface="Amiri" pitchFamily="2" charset="-78"/>
                 <a:cs typeface="Amiri" pitchFamily="2" charset="-78"/>
               </a:rPr>
               <a:t>نَمُوذَجُ الإِجَابَةِ</a:t>
@@ -9503,6 +9582,7 @@
                   <a:srgbClr val="1B3B6F"/>
                 </a:solidFill>
                 <a:latin typeface="Amiri" pitchFamily="2" charset="-78"/>
+                <a:ea typeface="Amiri" pitchFamily="2" charset="-78"/>
                 <a:cs typeface="Amiri" pitchFamily="2" charset="-78"/>
               </a:rPr>
               <a:t>أَحْتَاجُ إِلَى دَفْتَرَيْنِ وَقَلَمٍ أَزْرَقَ.</a:t>
@@ -9579,6 +9659,7 @@
                   <a:srgbClr val="1B3B6F"/>
                 </a:solidFill>
                 <a:latin typeface="Amiri" pitchFamily="2" charset="-78"/>
+                <a:ea typeface="Amiri" pitchFamily="2" charset="-78"/>
                 <a:cs typeface="Amiri" pitchFamily="2" charset="-78"/>
               </a:rPr>
               <a:t>أَهْلًا! مَاذَا تَحْتَاجُ لِلْمَدْرَسَةِ؟</a:t>
@@ -9682,6 +9763,7 @@
                   <a:srgbClr val="1B3B6F"/>
                 </a:solidFill>
                 <a:latin typeface="Amiri" pitchFamily="2" charset="-78"/>
+                <a:ea typeface="Amiri" pitchFamily="2" charset="-78"/>
                 <a:cs typeface="Amiri" pitchFamily="2" charset="-78"/>
               </a:rPr>
               <a:t>أُرِيدُ هٰذَا الدَّفْتَرَ الكَبِيرَ، لِأَنَّهُ أَفْضَلُ لِلرِّيَاضِيَّاتِ.</a:t>
@@ -9758,6 +9840,7 @@
                   <a:srgbClr val="1B3B6F"/>
                 </a:solidFill>
                 <a:latin typeface="Amiri" pitchFamily="2" charset="-78"/>
+                <a:ea typeface="Amiri" pitchFamily="2" charset="-78"/>
                 <a:cs typeface="Amiri" pitchFamily="2" charset="-78"/>
               </a:rPr>
               <a:t>هٰذَا الدَّفْتَرُ كَبِيرٌ، وَهٰذَا صَغِيرٌ.</a:t>
@@ -9861,6 +9944,7 @@
                   <a:srgbClr val="1B3B6F"/>
                 </a:solidFill>
                 <a:latin typeface="Amiri" pitchFamily="2" charset="-78"/>
+                <a:ea typeface="Amiri" pitchFamily="2" charset="-78"/>
                 <a:cs typeface="Amiri" pitchFamily="2" charset="-78"/>
               </a:rPr>
               <a:t>نَعَمْ، هَلْ عِنْدَكَ مِسْطَرَةٌ خَضْرَاءُ؟</a:t>
@@ -9937,6 +10021,7 @@
                   <a:srgbClr val="1B3B6F"/>
                 </a:solidFill>
                 <a:latin typeface="Amiri" pitchFamily="2" charset="-78"/>
+                <a:ea typeface="Amiri" pitchFamily="2" charset="-78"/>
                 <a:cs typeface="Amiri" pitchFamily="2" charset="-78"/>
               </a:rPr>
               <a:t>هَلْ تَحْتَاجُ إِلَى مِسْطَرَةٍ؟</a:t>
@@ -10040,6 +10125,7 @@
                   <a:srgbClr val="1B3B6F"/>
                 </a:solidFill>
                 <a:latin typeface="Amiri" pitchFamily="2" charset="-78"/>
+                <a:ea typeface="Amiri" pitchFamily="2" charset="-78"/>
                 <a:cs typeface="Amiri" pitchFamily="2" charset="-78"/>
               </a:rPr>
               <a:t>كَمْ ثَمَنُ كُلِّ هٰذِهِ الأَشْيَاءِ؟</a:t>
@@ -10116,6 +10202,7 @@
                   <a:srgbClr val="1B3B6F"/>
                 </a:solidFill>
                 <a:latin typeface="Amiri" pitchFamily="2" charset="-78"/>
+                <a:ea typeface="Amiri" pitchFamily="2" charset="-78"/>
                 <a:cs typeface="Amiri" pitchFamily="2" charset="-78"/>
               </a:rPr>
               <a:t>نَعَمْ، تَفَضَّلْ.</a:t>
@@ -10219,6 +10306,7 @@
                   <a:srgbClr val="1B3B6F"/>
                 </a:solidFill>
                 <a:latin typeface="Amiri" pitchFamily="2" charset="-78"/>
+                <a:ea typeface="Amiri" pitchFamily="2" charset="-78"/>
                 <a:cs typeface="Amiri" pitchFamily="2" charset="-78"/>
               </a:rPr>
               <a:t>مَادَّتِيَ المُفَضَّلَةُ العُلُومُ، لِأَنَّهَا مُمْتِعَةٌ.</a:t>
@@ -10295,6 +10383,7 @@
                   <a:srgbClr val="1B3B6F"/>
                 </a:solidFill>
                 <a:latin typeface="Amiri" pitchFamily="2" charset="-78"/>
+                <a:ea typeface="Amiri" pitchFamily="2" charset="-78"/>
                 <a:cs typeface="Amiri" pitchFamily="2" charset="-78"/>
               </a:rPr>
               <a:t>مَا مَادَّتُكَ المُفَضَّلَةُ؟</a:t>
@@ -10504,6 +10593,7 @@
                   <a:srgbClr val="D4AF37"/>
                 </a:solidFill>
                 <a:latin typeface="Amiri" pitchFamily="2" charset="-78"/>
+                <a:ea typeface="Amiri" pitchFamily="2" charset="-78"/>
                 <a:cs typeface="Amiri" pitchFamily="2" charset="-78"/>
               </a:rPr>
               <a:t>م</a:t>
@@ -10824,6 +10914,7 @@
                   <a:srgbClr val="8A6D1E"/>
                 </a:solidFill>
                 <a:latin typeface="Amiri" pitchFamily="2" charset="-78"/>
+                <a:ea typeface="Amiri" pitchFamily="2" charset="-78"/>
                 <a:cs typeface="Amiri" pitchFamily="2" charset="-78"/>
               </a:rPr>
               <a:t>نَمُوذَجُ الإِجَابَةِ</a:t>
@@ -11066,6 +11157,7 @@
                   <a:srgbClr val="1B3B6F"/>
                 </a:solidFill>
                 <a:latin typeface="Amiri" pitchFamily="2" charset="-78"/>
+                <a:ea typeface="Amiri" pitchFamily="2" charset="-78"/>
                 <a:cs typeface="Amiri" pitchFamily="2" charset="-78"/>
               </a:rPr>
               <a:t>هٰذَا فَصْلُ العُلُومِ.</a:t>
@@ -11142,6 +11234,7 @@
                   <a:srgbClr val="1B3B6F"/>
                 </a:solidFill>
                 <a:latin typeface="Amiri" pitchFamily="2" charset="-78"/>
+                <a:ea typeface="Amiri" pitchFamily="2" charset="-78"/>
                 <a:cs typeface="Amiri" pitchFamily="2" charset="-78"/>
               </a:rPr>
               <a:t>مَا هٰذَا الفَصْلُ؟</a:t>
@@ -11245,6 +11338,7 @@
                   <a:srgbClr val="1B3B6F"/>
                 </a:solidFill>
                 <a:latin typeface="Amiri" pitchFamily="2" charset="-78"/>
+                <a:ea typeface="Amiri" pitchFamily="2" charset="-78"/>
                 <a:cs typeface="Amiri" pitchFamily="2" charset="-78"/>
               </a:rPr>
               <a:t>يُوجَدُ فِيهِ مُخْتَبَرٌ صَغِيرٌ، وَتُوجَدُ سَبُّورَةٌ ذَكِيَّةٌ وَحَوَاسِيبُ كَثِيرَةٌ.</a:t>
@@ -11321,6 +11415,7 @@
                   <a:srgbClr val="1B3B6F"/>
                 </a:solidFill>
                 <a:latin typeface="Amiri" pitchFamily="2" charset="-78"/>
+                <a:ea typeface="Amiri" pitchFamily="2" charset="-78"/>
                 <a:cs typeface="Amiri" pitchFamily="2" charset="-78"/>
               </a:rPr>
               <a:t>مَاذَا يُوجَدُ فِيهِ؟</a:t>
@@ -11424,6 +11519,7 @@
                   <a:srgbClr val="1B3B6F"/>
                 </a:solidFill>
                 <a:latin typeface="Amiri" pitchFamily="2" charset="-78"/>
+                <a:ea typeface="Amiri" pitchFamily="2" charset="-78"/>
                 <a:cs typeface="Amiri" pitchFamily="2" charset="-78"/>
               </a:rPr>
               <a:t>هٰذِهِ الشَّاشَةُ الَّتِي يَعْرِضُ عَلَيْهَا المُعَلِّمُ التَّجَارِبَ.</a:t>
@@ -11500,6 +11596,7 @@
                   <a:srgbClr val="1B3B6F"/>
                 </a:solidFill>
                 <a:latin typeface="Amiri" pitchFamily="2" charset="-78"/>
+                <a:ea typeface="Amiri" pitchFamily="2" charset="-78"/>
                 <a:cs typeface="Amiri" pitchFamily="2" charset="-78"/>
               </a:rPr>
               <a:t>وَهٰذِهِ الشَّاشَةُ؟</a:t>
@@ -11603,6 +11700,7 @@
                   <a:srgbClr val="1B3B6F"/>
                 </a:solidFill>
                 <a:latin typeface="Amiri" pitchFamily="2" charset="-78"/>
+                <a:ea typeface="Amiri" pitchFamily="2" charset="-78"/>
                 <a:cs typeface="Amiri" pitchFamily="2" charset="-78"/>
               </a:rPr>
               <a:t>لَا، الهَوَاتِفُ مَمْنُوعَةٌ، لٰكِنْ نَسْتَخْدِمُ الحَوَاسِيبَ اللَّوْحِيَّةَ أَحْيَانًا.</a:t>
@@ -11679,6 +11777,7 @@
                   <a:srgbClr val="1B3B6F"/>
                 </a:solidFill>
                 <a:latin typeface="Amiri" pitchFamily="2" charset="-78"/>
+                <a:ea typeface="Amiri" pitchFamily="2" charset="-78"/>
                 <a:cs typeface="Amiri" pitchFamily="2" charset="-78"/>
               </a:rPr>
               <a:t>هَلْ تَسْتَخْدِمُونَ الهَوَاتِفَ فِي الحِصَّةِ؟</a:t>
@@ -11782,6 +11881,7 @@
                   <a:srgbClr val="1B3B6F"/>
                 </a:solidFill>
                 <a:latin typeface="Amiri" pitchFamily="2" charset="-78"/>
+                <a:ea typeface="Amiri" pitchFamily="2" charset="-78"/>
                 <a:cs typeface="Amiri" pitchFamily="2" charset="-78"/>
               </a:rPr>
               <a:t>نَعَمْ، كَثِيرًا. وَأَنْتَ، هَلْ عِنْدَكُمْ مُخْتَبَرٌ مِثْلُهُ فِي مَدْرَسَةِ ابْنِكَ؟</a:t>
@@ -11858,6 +11958,7 @@
                   <a:srgbClr val="1B3B6F"/>
                 </a:solidFill>
                 <a:latin typeface="Amiri" pitchFamily="2" charset="-78"/>
+                <a:ea typeface="Amiri" pitchFamily="2" charset="-78"/>
                 <a:cs typeface="Amiri" pitchFamily="2" charset="-78"/>
               </a:rPr>
               <a:t>هَلْ يُعْجِبُكَ هٰذَا الفَصْلُ؟</a:t>
@@ -12067,6 +12168,7 @@
                   <a:srgbClr val="D4AF37"/>
                 </a:solidFill>
                 <a:latin typeface="Amiri" pitchFamily="2" charset="-78"/>
+                <a:ea typeface="Amiri" pitchFamily="2" charset="-78"/>
                 <a:cs typeface="Amiri" pitchFamily="2" charset="-78"/>
               </a:rPr>
               <a:t>م</a:t>
@@ -12387,6 +12489,7 @@
                   <a:srgbClr val="8A6D1E"/>
                 </a:solidFill>
                 <a:latin typeface="Amiri" pitchFamily="2" charset="-78"/>
+                <a:ea typeface="Amiri" pitchFamily="2" charset="-78"/>
                 <a:cs typeface="Amiri" pitchFamily="2" charset="-78"/>
               </a:rPr>
               <a:t>نَمُوذَجُ الإِجَابَةِ</a:t>
@@ -12629,6 +12732,7 @@
                   <a:srgbClr val="1B3B6F"/>
                 </a:solidFill>
                 <a:latin typeface="Amiri" pitchFamily="2" charset="-78"/>
+                <a:ea typeface="Amiri" pitchFamily="2" charset="-78"/>
                 <a:cs typeface="Amiri" pitchFamily="2" charset="-78"/>
               </a:rPr>
               <a:t>تَجِدُهَا عَلَى المِنَصَّةِ الَّتِي يَرْفَعُ عَلَيْهَا المُعَلِّمُونَ الوَاجِبَاتِ كُلَّ يَوْمٍ.</a:t>
@@ -12705,6 +12809,7 @@
                   <a:srgbClr val="1B3B6F"/>
                 </a:solidFill>
                 <a:latin typeface="Amiri" pitchFamily="2" charset="-78"/>
+                <a:ea typeface="Amiri" pitchFamily="2" charset="-78"/>
                 <a:cs typeface="Amiri" pitchFamily="2" charset="-78"/>
               </a:rPr>
               <a:t>كَيْفَ أَعْرِفُ الوَاجِبَاتِ؟</a:t>
@@ -12808,6 +12913,7 @@
                   <a:srgbClr val="1B3B6F"/>
                 </a:solidFill>
                 <a:latin typeface="Amiri" pitchFamily="2" charset="-78"/>
+                <a:ea typeface="Amiri" pitchFamily="2" charset="-78"/>
                 <a:cs typeface="Amiri" pitchFamily="2" charset="-78"/>
               </a:rPr>
               <a:t>ارْفَعْ يَدَكَ قَبْلَ أَنْ تَتَكَلَّمَ، وَلَا تَأْكُلْ فِي الفَصْلِ.</a:t>
@@ -12884,6 +12990,7 @@
                   <a:srgbClr val="1B3B6F"/>
                 </a:solidFill>
                 <a:latin typeface="Amiri" pitchFamily="2" charset="-78"/>
+                <a:ea typeface="Amiri" pitchFamily="2" charset="-78"/>
                 <a:cs typeface="Amiri" pitchFamily="2" charset="-78"/>
               </a:rPr>
               <a:t>وَمَا القَوَاعِدُ المُهِمَّةُ فِي الفَصْلِ؟</a:t>
@@ -12987,6 +13094,7 @@
                   <a:srgbClr val="1B3B6F"/>
                 </a:solidFill>
                 <a:latin typeface="Amiri" pitchFamily="2" charset="-78"/>
+                <a:ea typeface="Amiri" pitchFamily="2" charset="-78"/>
                 <a:cs typeface="Amiri" pitchFamily="2" charset="-78"/>
               </a:rPr>
               <a:t>فِي يَوْمِي الأَوَّلِ ضِعْتُ فِي المَمَرَّاتِ، لٰكِنَّ طَالِبًا لَطِيفًا سَاعَدَنِي، فَأَصْبَحْنَا صَدِيقَيْنِ.</a:t>
@@ -13063,6 +13171,7 @@
                   <a:srgbClr val="1B3B6F"/>
                 </a:solidFill>
                 <a:latin typeface="Amiri" pitchFamily="2" charset="-78"/>
+                <a:ea typeface="Amiri" pitchFamily="2" charset="-78"/>
                 <a:cs typeface="Amiri" pitchFamily="2" charset="-78"/>
               </a:rPr>
               <a:t>كَيْفَ كَانَ يَوْمُكَ الأَوَّلُ هُنَا؟</a:t>
@@ -13166,6 +13275,7 @@
                   <a:srgbClr val="1B3B6F"/>
                 </a:solidFill>
                 <a:latin typeface="Amiri" pitchFamily="2" charset="-78"/>
+                <a:ea typeface="Amiri" pitchFamily="2" charset="-78"/>
                 <a:cs typeface="Amiri" pitchFamily="2" charset="-78"/>
               </a:rPr>
               <a:t>الحَاسُوبُ أَسْرَعُ وَأَسْهَلُ لِلْبَحْثِ، لٰكِنَّ الدَّفْتَرَ يُسَاعِدُنِي عَلَى التَّذَكُّرِ أَكْثَرَ.</a:t>
@@ -13242,6 +13352,7 @@
                   <a:srgbClr val="1B3B6F"/>
                 </a:solidFill>
                 <a:latin typeface="Amiri" pitchFamily="2" charset="-78"/>
+                <a:ea typeface="Amiri" pitchFamily="2" charset="-78"/>
                 <a:cs typeface="Amiri" pitchFamily="2" charset="-78"/>
               </a:rPr>
               <a:t>هَلِ الحَاسُوبُ أَفْضَلُ مِنَ الدَّفْتَرِ؟</a:t>
@@ -13345,6 +13456,7 @@
                   <a:srgbClr val="1B3B6F"/>
                 </a:solidFill>
                 <a:latin typeface="Amiri" pitchFamily="2" charset="-78"/>
+                <a:ea typeface="Amiri" pitchFamily="2" charset="-78"/>
                 <a:cs typeface="Amiri" pitchFamily="2" charset="-78"/>
               </a:rPr>
               <a:t>طَبْعًا، سَنَدْرُسُ مَعًا فِي المَكْتَبَةِ يَوْمَ الثُّلَاثَاءِ بَعْدَ المَدْرَسَةِ.</a:t>
@@ -13421,6 +13533,7 @@
                   <a:srgbClr val="1B3B6F"/>
                 </a:solidFill>
                 <a:latin typeface="Amiri" pitchFamily="2" charset="-78"/>
+                <a:ea typeface="Amiri" pitchFamily="2" charset="-78"/>
                 <a:cs typeface="Amiri" pitchFamily="2" charset="-78"/>
               </a:rPr>
               <a:t>هَلْ سَتُسَاعِدُنِي فِي الرِّيَاضِيَّاتِ؟</a:t>
@@ -13630,6 +13743,7 @@
                   <a:srgbClr val="D4AF37"/>
                 </a:solidFill>
                 <a:latin typeface="Amiri" pitchFamily="2" charset="-78"/>
+                <a:ea typeface="Amiri" pitchFamily="2" charset="-78"/>
                 <a:cs typeface="Amiri" pitchFamily="2" charset="-78"/>
               </a:rPr>
               <a:t>م</a:t>
@@ -13950,6 +14064,7 @@
                   <a:srgbClr val="8A6D1E"/>
                 </a:solidFill>
                 <a:latin typeface="Amiri" pitchFamily="2" charset="-78"/>
+                <a:ea typeface="Amiri" pitchFamily="2" charset="-78"/>
                 <a:cs typeface="Amiri" pitchFamily="2" charset="-78"/>
               </a:rPr>
               <a:t>نَمُوذَجُ الإِجَابَةِ</a:t>
@@ -14192,6 +14307,7 @@
                   <a:srgbClr val="1B3B6F"/>
                 </a:solidFill>
                 <a:latin typeface="Amiri" pitchFamily="2" charset="-78"/>
+                <a:ea typeface="Amiri" pitchFamily="2" charset="-78"/>
                 <a:cs typeface="Amiri" pitchFamily="2" charset="-78"/>
               </a:rPr>
               <a:t>أَوَّلًا، لِأَنَّ الكُتُبَ الوَرَقِيَّةَ ثَقِيلَةٌ وَغَالِيَةٌ؛ ثَانِيًا، لِأَنَّ المِنَصَّاتِ الَّتِي نَسْتَخْدِمُهَا تَحْتَاجُ إِلَى جِهَازٍ خَاصٍّ.</a:t>
@@ -14268,6 +14384,7 @@
                   <a:srgbClr val="1B3B6F"/>
                 </a:solidFill>
                 <a:latin typeface="Amiri" pitchFamily="2" charset="-78"/>
+                <a:ea typeface="Amiri" pitchFamily="2" charset="-78"/>
                 <a:cs typeface="Amiri" pitchFamily="2" charset="-78"/>
               </a:rPr>
               <a:t>تَقْتَرِحُ أَنْ يَحْصُلَ كُلُّ طَالِبٍ عَلَى حَاسُوبٍ لَوْحِيٍّ. لِمَاذَا؟</a:t>
@@ -14371,6 +14488,7 @@
                   <a:srgbClr val="1B3B6F"/>
                 </a:solidFill>
                 <a:latin typeface="Amiri" pitchFamily="2" charset="-78"/>
+                <a:ea typeface="Amiri" pitchFamily="2" charset="-78"/>
                 <a:cs typeface="Amiri" pitchFamily="2" charset="-78"/>
               </a:rPr>
               <a:t>صَحِيحٌ أَنَّ بَعْضَهُمْ قَدْ يَلْعَبُ، غَيْرَ أَنَّنَا نَسْتَطِيعُ أَنْ نُغْلِقَ الأَلْعَابَ وَالمَوَاقِعَ غَيْرَ التَّعْلِيمِيَّةِ أَثْنَاءَ الحِصَصِ.</a:t>
@@ -14447,6 +14565,7 @@
                   <a:srgbClr val="1B3B6F"/>
                 </a:solidFill>
                 <a:latin typeface="Amiri" pitchFamily="2" charset="-78"/>
+                <a:ea typeface="Amiri" pitchFamily="2" charset="-78"/>
                 <a:cs typeface="Amiri" pitchFamily="2" charset="-78"/>
               </a:rPr>
               <a:t>لٰكِنَّ الطُّلَّابَ سَيَلْعَبُونَ بِهَا!</a:t>
@@ -14550,6 +14669,7 @@
                   <a:srgbClr val="1B3B6F"/>
                 </a:solidFill>
                 <a:latin typeface="Amiri" pitchFamily="2" charset="-78"/>
+                <a:ea typeface="Amiri" pitchFamily="2" charset="-78"/>
                 <a:cs typeface="Amiri" pitchFamily="2" charset="-78"/>
               </a:rPr>
               <a:t>نَعَمْ، فِي مَدْرَسَةِ ابْنِ عَمِّي، حَيْثُ وُزِّعَتِ الأَجْهِزَةُ العَامَ المَاضِي، فَتَحَسَّنَتْ نَتَائِجُ الطُّلَّابِ فِي القِرَاءَةِ.</a:t>
@@ -14626,6 +14746,7 @@
                   <a:srgbClr val="1B3B6F"/>
                 </a:solidFill>
                 <a:latin typeface="Amiri" pitchFamily="2" charset="-78"/>
+                <a:ea typeface="Amiri" pitchFamily="2" charset="-78"/>
                 <a:cs typeface="Amiri" pitchFamily="2" charset="-78"/>
               </a:rPr>
               <a:t>هَلْ جُرِّبَتْ هٰذِهِ الفِكْرَةُ مِنْ قَبْلُ؟</a:t>
@@ -14729,6 +14850,7 @@
                   <a:srgbClr val="1B3B6F"/>
                 </a:solidFill>
                 <a:latin typeface="Amiri" pitchFamily="2" charset="-78"/>
+                <a:ea typeface="Amiri" pitchFamily="2" charset="-78"/>
                 <a:cs typeface="Amiri" pitchFamily="2" charset="-78"/>
               </a:rPr>
               <a:t>مِنْ نَاحِيَةٍ، يَجِبُ أَنْ نَحْتَرِمَ اخْتِيَارَهُمْ، وَمِنْ نَاحِيَةٍ أُخْرَى، يَحْتَاجُ الجَمِيعُ إِلَى مَهَارَاتٍ رَقْمِيَّةٍ لِلْمُسْتَقْبَلِ.</a:t>
@@ -14805,6 +14927,7 @@
                   <a:srgbClr val="1B3B6F"/>
                 </a:solidFill>
                 <a:latin typeface="Amiri" pitchFamily="2" charset="-78"/>
+                <a:ea typeface="Amiri" pitchFamily="2" charset="-78"/>
                 <a:cs typeface="Amiri" pitchFamily="2" charset="-78"/>
               </a:rPr>
               <a:t>وَمَاذَا عَنِ الطُّلَّابِ الَّذِينَ يُفَضِّلُونَ الوَرَقَ؟</a:t>
@@ -14908,6 +15031,7 @@
                   <a:srgbClr val="1B3B6F"/>
                 </a:solidFill>
                 <a:latin typeface="Amiri" pitchFamily="2" charset="-78"/>
+                <a:ea typeface="Amiri" pitchFamily="2" charset="-78"/>
                 <a:cs typeface="Amiri" pitchFamily="2" charset="-78"/>
               </a:rPr>
               <a:t>لَوْ رَفَضَتِ الإِدَارَةُ، لَاقْتَرَحْنَا تَجْرِبَةً لِمُدَّةِ فَصْلٍ دِرَاسِيٍّ وَاحِدٍ فِي صَفٍّ وَاحِدٍ، ثُمَّ نُقَارِنُ النَّتَائِجَ.</a:t>
@@ -14984,6 +15108,7 @@
                   <a:srgbClr val="1B3B6F"/>
                 </a:solidFill>
                 <a:latin typeface="Amiri" pitchFamily="2" charset="-78"/>
+                <a:ea typeface="Amiri" pitchFamily="2" charset="-78"/>
                 <a:cs typeface="Amiri" pitchFamily="2" charset="-78"/>
               </a:rPr>
               <a:t>لَوْ رَفَضَتِ الإِدَارَةُ، مَاذَا تَفْعَلُونَ؟</a:t>
@@ -15193,6 +15318,7 @@
                   <a:srgbClr val="D4AF37"/>
                 </a:solidFill>
                 <a:latin typeface="Amiri" pitchFamily="2" charset="-78"/>
+                <a:ea typeface="Amiri" pitchFamily="2" charset="-78"/>
                 <a:cs typeface="Amiri" pitchFamily="2" charset="-78"/>
               </a:rPr>
               <a:t>م</a:t>
@@ -15513,6 +15639,7 @@
                   <a:srgbClr val="8A6D1E"/>
                 </a:solidFill>
                 <a:latin typeface="Amiri" pitchFamily="2" charset="-78"/>
+                <a:ea typeface="Amiri" pitchFamily="2" charset="-78"/>
                 <a:cs typeface="Amiri" pitchFamily="2" charset="-78"/>
               </a:rPr>
               <a:t>فَصْلِي</a:t>
@@ -15793,6 +15920,7 @@
                   <a:srgbClr val="1B3B6F"/>
                 </a:solidFill>
                 <a:latin typeface="Amiri" pitchFamily="2" charset="-78"/>
+                <a:ea typeface="Amiri" pitchFamily="2" charset="-78"/>
                 <a:cs typeface="Amiri" pitchFamily="2" charset="-78"/>
               </a:rPr>
               <a:t>فَصْلِي … وَ…</a:t>
@@ -15869,6 +15997,7 @@
                   <a:srgbClr val="1B3B6F"/>
                 </a:solidFill>
                 <a:latin typeface="Amiri" pitchFamily="2" charset="-78"/>
+                <a:ea typeface="Amiri" pitchFamily="2" charset="-78"/>
                 <a:cs typeface="Amiri" pitchFamily="2" charset="-78"/>
               </a:rPr>
               <a:t>صِفْ فَصْلَكَ.</a:t>
@@ -16037,6 +16166,7 @@
                   <a:srgbClr val="1B3B6F"/>
                 </a:solidFill>
                 <a:latin typeface="Amiri" pitchFamily="2" charset="-78"/>
+                <a:ea typeface="Amiri" pitchFamily="2" charset="-78"/>
                 <a:cs typeface="Amiri" pitchFamily="2" charset="-78"/>
               </a:rPr>
               <a:t>يُوجَدُ … وَتُوجَدُ …</a:t>
@@ -16113,6 +16243,7 @@
                   <a:srgbClr val="1B3B6F"/>
                 </a:solidFill>
                 <a:latin typeface="Amiri" pitchFamily="2" charset="-78"/>
+                <a:ea typeface="Amiri" pitchFamily="2" charset="-78"/>
                 <a:cs typeface="Amiri" pitchFamily="2" charset="-78"/>
               </a:rPr>
               <a:t>مَاذَا يُوجَدُ فِي فَصْلِكَ؟</a:t>
@@ -16281,6 +16412,7 @@
                   <a:srgbClr val="1B3B6F"/>
                 </a:solidFill>
                 <a:latin typeface="Amiri" pitchFamily="2" charset="-78"/>
+                <a:ea typeface="Amiri" pitchFamily="2" charset="-78"/>
                 <a:cs typeface="Amiri" pitchFamily="2" charset="-78"/>
               </a:rPr>
               <a:t>فِي حَقِيبَتِي …</a:t>
@@ -16357,6 +16489,7 @@
                   <a:srgbClr val="1B3B6F"/>
                 </a:solidFill>
                 <a:latin typeface="Amiri" pitchFamily="2" charset="-78"/>
+                <a:ea typeface="Amiri" pitchFamily="2" charset="-78"/>
                 <a:cs typeface="Amiri" pitchFamily="2" charset="-78"/>
               </a:rPr>
               <a:t>مَاذَا فِي حَقِيبَتِكَ؟</a:t>
@@ -16525,6 +16658,7 @@
                   <a:srgbClr val="1B3B6F"/>
                 </a:solidFill>
                 <a:latin typeface="Amiri" pitchFamily="2" charset="-78"/>
+                <a:ea typeface="Amiri" pitchFamily="2" charset="-78"/>
                 <a:cs typeface="Amiri" pitchFamily="2" charset="-78"/>
               </a:rPr>
               <a:t>نَعَمْ، أَسْتَخْدِمُهُ لِلْبَحْثِ …</a:t>
@@ -16601,6 +16735,7 @@
                   <a:srgbClr val="1B3B6F"/>
                 </a:solidFill>
                 <a:latin typeface="Amiri" pitchFamily="2" charset="-78"/>
+                <a:ea typeface="Amiri" pitchFamily="2" charset="-78"/>
                 <a:cs typeface="Amiri" pitchFamily="2" charset="-78"/>
               </a:rPr>
               <a:t>هَلْ تَسْتَخْدِمُ الحَاسُوبَ فِي المَدْرَسَةِ؟</a:t>
@@ -16769,6 +16904,7 @@
                   <a:srgbClr val="1B3B6F"/>
                 </a:solidFill>
                 <a:latin typeface="Amiri" pitchFamily="2" charset="-78"/>
+                <a:ea typeface="Amiri" pitchFamily="2" charset="-78"/>
                 <a:cs typeface="Amiri" pitchFamily="2" charset="-78"/>
               </a:rPr>
               <a:t>لَا، الهَوَاتِفُ …</a:t>
@@ -16845,6 +16981,7 @@
                   <a:srgbClr val="1B3B6F"/>
                 </a:solidFill>
                 <a:latin typeface="Amiri" pitchFamily="2" charset="-78"/>
+                <a:ea typeface="Amiri" pitchFamily="2" charset="-78"/>
                 <a:cs typeface="Amiri" pitchFamily="2" charset="-78"/>
               </a:rPr>
               <a:t>هَلِ الهَوَاتِفُ مَسْمُوحَةٌ فِي فَصْلِكَ؟</a:t>
@@ -16999,6 +17136,7 @@
                   <a:srgbClr val="1B3B6F"/>
                 </a:solidFill>
                 <a:latin typeface="Amiri" pitchFamily="2" charset="-78"/>
+                <a:ea typeface="Amiri" pitchFamily="2" charset="-78"/>
                 <a:cs typeface="Amiri" pitchFamily="2" charset="-78"/>
               </a:rPr>
               <a:t>عَفْوًا، هَلْ يُمْكِنُ أَنْ تُعِيدَ السُّؤَالَ؟</a:t>
@@ -17132,6 +17270,7 @@
                   <a:srgbClr val="D4AF37"/>
                 </a:solidFill>
                 <a:latin typeface="Amiri" pitchFamily="2" charset="-78"/>
+                <a:ea typeface="Amiri" pitchFamily="2" charset="-78"/>
                 <a:cs typeface="Amiri" pitchFamily="2" charset="-78"/>
               </a:rPr>
               <a:t>م</a:t>
@@ -17452,6 +17591,7 @@
                   <a:srgbClr val="8A6D1E"/>
                 </a:solidFill>
                 <a:latin typeface="Amiri" pitchFamily="2" charset="-78"/>
+                <a:ea typeface="Amiri" pitchFamily="2" charset="-78"/>
                 <a:cs typeface="Amiri" pitchFamily="2" charset="-78"/>
               </a:rPr>
               <a:t>أَدَوَاتُ التَّعَلُّمِ</a:t>
@@ -17732,6 +17872,7 @@
                   <a:srgbClr val="1B3B6F"/>
                 </a:solidFill>
                 <a:latin typeface="Amiri" pitchFamily="2" charset="-78"/>
+                <a:ea typeface="Amiri" pitchFamily="2" charset="-78"/>
                 <a:cs typeface="Amiri" pitchFamily="2" charset="-78"/>
               </a:rPr>
               <a:t>الأَدَاةُ الَّتِي … هِيَ …</a:t>
@@ -17808,6 +17949,7 @@
                   <a:srgbClr val="1B3B6F"/>
                 </a:solidFill>
                 <a:latin typeface="Amiri" pitchFamily="2" charset="-78"/>
+                <a:ea typeface="Amiri" pitchFamily="2" charset="-78"/>
                 <a:cs typeface="Amiri" pitchFamily="2" charset="-78"/>
               </a:rPr>
               <a:t>مَا الأَدَاةُ الَّتِي لَا تَسْتَطِيعُ أَنْ تَدْرُسَ بِدُونِهَا؟</a:t>
@@ -17911,6 +18053,7 @@
                   <a:srgbClr val="1B3B6F"/>
                 </a:solidFill>
                 <a:latin typeface="Amiri" pitchFamily="2" charset="-78"/>
+                <a:ea typeface="Amiri" pitchFamily="2" charset="-78"/>
                 <a:cs typeface="Amiri" pitchFamily="2" charset="-78"/>
               </a:rPr>
               <a:t>كَانَ فَصْلِي … وَكَانَتْ …</a:t>
@@ -17987,6 +18130,7 @@
                   <a:srgbClr val="1B3B6F"/>
                 </a:solidFill>
                 <a:latin typeface="Amiri" pitchFamily="2" charset="-78"/>
+                <a:ea typeface="Amiri" pitchFamily="2" charset="-78"/>
                 <a:cs typeface="Amiri" pitchFamily="2" charset="-78"/>
               </a:rPr>
               <a:t>صِفْ فَصْلَكَ فِي المَدْرَسَةِ الابْتِدَائِيَّةِ.</a:t>
@@ -18090,6 +18234,7 @@
                   <a:srgbClr val="1B3B6F"/>
                 </a:solidFill>
                 <a:latin typeface="Amiri" pitchFamily="2" charset="-78"/>
+                <a:ea typeface="Amiri" pitchFamily="2" charset="-78"/>
                 <a:cs typeface="Amiri" pitchFamily="2" charset="-78"/>
               </a:rPr>
               <a:t>يَجِبُ أَنْ … وَمَمْنُوعٌ أَنْ …</a:t>
@@ -18166,6 +18311,7 @@
                   <a:srgbClr val="1B3B6F"/>
                 </a:solidFill>
                 <a:latin typeface="Amiri" pitchFamily="2" charset="-78"/>
+                <a:ea typeface="Amiri" pitchFamily="2" charset="-78"/>
                 <a:cs typeface="Amiri" pitchFamily="2" charset="-78"/>
               </a:rPr>
               <a:t>مَا القَوَاعِدُ فِي فَصْلِكَ؟</a:t>
@@ -18269,6 +18415,7 @@
                   <a:srgbClr val="1B3B6F"/>
                 </a:solidFill>
                 <a:latin typeface="Amiri" pitchFamily="2" charset="-78"/>
+                <a:ea typeface="Amiri" pitchFamily="2" charset="-78"/>
                 <a:cs typeface="Amiri" pitchFamily="2" charset="-78"/>
               </a:rPr>
               <a:t>أُفَضِّلُ … لِأَنَّ … لٰكِنَّ …</a:t>
@@ -18345,6 +18492,7 @@
                   <a:srgbClr val="1B3B6F"/>
                 </a:solidFill>
                 <a:latin typeface="Amiri" pitchFamily="2" charset="-78"/>
+                <a:ea typeface="Amiri" pitchFamily="2" charset="-78"/>
                 <a:cs typeface="Amiri" pitchFamily="2" charset="-78"/>
               </a:rPr>
               <a:t>هَلْ تُفَضِّلُ الكُتُبَ الوَرَقِيَّةَ أَمِ الإِلِكْتْرُونِيَّةَ؟</a:t>
@@ -18448,6 +18596,7 @@
                   <a:srgbClr val="1B3B6F"/>
                 </a:solidFill>
                 <a:latin typeface="Amiri" pitchFamily="2" charset="-78"/>
+                <a:ea typeface="Amiri" pitchFamily="2" charset="-78"/>
                 <a:cs typeface="Amiri" pitchFamily="2" charset="-78"/>
               </a:rPr>
               <a:t>سَيَكُونُ فِيهِ … وَسَنَدْرُسُ …</a:t>
@@ -18524,6 +18673,7 @@
                   <a:srgbClr val="1B3B6F"/>
                 </a:solidFill>
                 <a:latin typeface="Amiri" pitchFamily="2" charset="-78"/>
+                <a:ea typeface="Amiri" pitchFamily="2" charset="-78"/>
                 <a:cs typeface="Amiri" pitchFamily="2" charset="-78"/>
               </a:rPr>
               <a:t>كَيْفَ سَيَكُونُ فَصْلُ المُسْتَقْبَلِ؟</a:t>
@@ -18733,6 +18883,7 @@
                   <a:srgbClr val="D4AF37"/>
                 </a:solidFill>
                 <a:latin typeface="Amiri" pitchFamily="2" charset="-78"/>
+                <a:ea typeface="Amiri" pitchFamily="2" charset="-78"/>
                 <a:cs typeface="Amiri" pitchFamily="2" charset="-78"/>
               </a:rPr>
               <a:t>م</a:t>
@@ -19053,6 +19204,7 @@
                   <a:srgbClr val="8A6D1E"/>
                 </a:solidFill>
                 <a:latin typeface="Amiri" pitchFamily="2" charset="-78"/>
+                <a:ea typeface="Amiri" pitchFamily="2" charset="-78"/>
                 <a:cs typeface="Amiri" pitchFamily="2" charset="-78"/>
               </a:rPr>
               <a:t>التِّكْنُولُوجْيَا فِي الفَصْلِ</a:t>
@@ -19333,6 +19485,7 @@
                   <a:srgbClr val="1B3B6F"/>
                 </a:solidFill>
                 <a:latin typeface="Amiri" pitchFamily="2" charset="-78"/>
+                <a:ea typeface="Amiri" pitchFamily="2" charset="-78"/>
                 <a:cs typeface="Amiri" pitchFamily="2" charset="-78"/>
               </a:rPr>
               <a:t>مِنْ نَاحِيَةٍ … وَمِنْ نَاحِيَةٍ أُخْرَى …</a:t>
@@ -19409,6 +19562,7 @@
                   <a:srgbClr val="1B3B6F"/>
                 </a:solidFill>
                 <a:latin typeface="Amiri" pitchFamily="2" charset="-78"/>
+                <a:ea typeface="Amiri" pitchFamily="2" charset="-78"/>
                 <a:cs typeface="Amiri" pitchFamily="2" charset="-78"/>
               </a:rPr>
               <a:t>هَلْ تُسَاعِدُ التِّكْنُولُوجْيَا الطُّلَّابَ عَلَى التَّعَلُّمِ؟</a:t>
@@ -19512,6 +19666,7 @@
                   <a:srgbClr val="1B3B6F"/>
                 </a:solidFill>
                 <a:latin typeface="Amiri" pitchFamily="2" charset="-78"/>
+                <a:ea typeface="Amiri" pitchFamily="2" charset="-78"/>
                 <a:cs typeface="Amiri" pitchFamily="2" charset="-78"/>
               </a:rPr>
               <a:t>صَحِيحٌ أَنَّ … غَيْرَ أَنَّ …</a:t>
@@ -19588,6 +19743,7 @@
                   <a:srgbClr val="1B3B6F"/>
                 </a:solidFill>
                 <a:latin typeface="Amiri" pitchFamily="2" charset="-78"/>
+                <a:ea typeface="Amiri" pitchFamily="2" charset="-78"/>
                 <a:cs typeface="Amiri" pitchFamily="2" charset="-78"/>
               </a:rPr>
               <a:t>هَلْ يَجِبُ أَنْ تُمْنَعَ الهَوَاتِفُ فِي المَدَارِسِ؟</a:t>
@@ -19691,6 +19847,7 @@
                   <a:srgbClr val="1B3B6F"/>
                 </a:solidFill>
                 <a:latin typeface="Amiri" pitchFamily="2" charset="-78"/>
+                <a:ea typeface="Amiri" pitchFamily="2" charset="-78"/>
                 <a:cs typeface="Amiri" pitchFamily="2" charset="-78"/>
               </a:rPr>
               <a:t>أَوَّلًا … بِالإِضَافَةِ إِلَى ذٰلِكَ …</a:t>
@@ -19767,6 +19924,7 @@
                   <a:srgbClr val="1B3B6F"/>
                 </a:solidFill>
                 <a:latin typeface="Amiri" pitchFamily="2" charset="-78"/>
+                <a:ea typeface="Amiri" pitchFamily="2" charset="-78"/>
                 <a:cs typeface="Amiri" pitchFamily="2" charset="-78"/>
               </a:rPr>
               <a:t>مَا الَّذِي يَجْعَلُ الفَصْلَ مَكَانًا جَيِّدًا لِلتَّعَلُّمِ؟</a:t>
@@ -19870,6 +20028,7 @@
                   <a:srgbClr val="1B3B6F"/>
                 </a:solidFill>
                 <a:latin typeface="Amiri" pitchFamily="2" charset="-78"/>
+                <a:ea typeface="Amiri" pitchFamily="2" charset="-78"/>
                 <a:cs typeface="Amiri" pitchFamily="2" charset="-78"/>
               </a:rPr>
               <a:t>كَانُوا … أَمَّا نَحْنُ فَنَجِدُ …</a:t>
@@ -19946,6 +20105,7 @@
                   <a:srgbClr val="1B3B6F"/>
                 </a:solidFill>
                 <a:latin typeface="Amiri" pitchFamily="2" charset="-78"/>
+                <a:ea typeface="Amiri" pitchFamily="2" charset="-78"/>
                 <a:cs typeface="Amiri" pitchFamily="2" charset="-78"/>
               </a:rPr>
               <a:t>كَيْفَ كَانَ الطُّلَّابُ يَتَعَلَّمُونَ قَبْلَ الإِنْتَرْنِتِ؟</a:t>
@@ -20049,6 +20209,7 @@
                   <a:srgbClr val="1B3B6F"/>
                 </a:solidFill>
                 <a:latin typeface="Amiri" pitchFamily="2" charset="-78"/>
+                <a:ea typeface="Amiri" pitchFamily="2" charset="-78"/>
                 <a:cs typeface="Amiri" pitchFamily="2" charset="-78"/>
               </a:rPr>
               <a:t>لَوْ صَمَّمْتُهُ، لَجَعَلْتُ …</a:t>
@@ -20125,6 +20286,7 @@
                   <a:srgbClr val="1B3B6F"/>
                 </a:solidFill>
                 <a:latin typeface="Amiri" pitchFamily="2" charset="-78"/>
+                <a:ea typeface="Amiri" pitchFamily="2" charset="-78"/>
                 <a:cs typeface="Amiri" pitchFamily="2" charset="-78"/>
               </a:rPr>
               <a:t>لَوْ صَمَّمْتَ فَصْلًا مِثَالِيًّا، كَيْفَ يَكُونُ؟</a:t>
@@ -20334,6 +20496,7 @@
                   <a:srgbClr val="D4AF37"/>
                 </a:solidFill>
                 <a:latin typeface="Amiri" pitchFamily="2" charset="-78"/>
+                <a:ea typeface="Amiri" pitchFamily="2" charset="-78"/>
                 <a:cs typeface="Amiri" pitchFamily="2" charset="-78"/>
               </a:rPr>
               <a:t>م</a:t>
@@ -20654,6 +20817,7 @@
                   <a:srgbClr val="8A6D1E"/>
                 </a:solidFill>
                 <a:latin typeface="Amiri" pitchFamily="2" charset="-78"/>
+                <a:ea typeface="Amiri" pitchFamily="2" charset="-78"/>
                 <a:cs typeface="Amiri" pitchFamily="2" charset="-78"/>
               </a:rPr>
               <a:t>آدَابُ الصَّفِّ</a:t>
@@ -22185,6 +22349,7 @@
                   <a:srgbClr val="D4AF37"/>
                 </a:solidFill>
                 <a:latin typeface="Amiri" pitchFamily="2" charset="-78"/>
+                <a:ea typeface="Amiri" pitchFamily="2" charset="-78"/>
                 <a:cs typeface="Amiri" pitchFamily="2" charset="-78"/>
               </a:rPr>
               <a:t>م</a:t>
@@ -22505,6 +22670,7 @@
                   <a:srgbClr val="8A6D1E"/>
                 </a:solidFill>
                 <a:latin typeface="Amiri" pitchFamily="2" charset="-78"/>
+                <a:ea typeface="Amiri" pitchFamily="2" charset="-78"/>
                 <a:cs typeface="Amiri" pitchFamily="2" charset="-78"/>
               </a:rPr>
               <a:t>نَمُوذَجُ الإِجَابَةِ</a:t>
@@ -22747,6 +22913,7 @@
                   <a:srgbClr val="1B3B6F"/>
                 </a:solidFill>
                 <a:latin typeface="Amiri" pitchFamily="2" charset="-78"/>
+                <a:ea typeface="Amiri" pitchFamily="2" charset="-78"/>
                 <a:cs typeface="Amiri" pitchFamily="2" charset="-78"/>
               </a:rPr>
               <a:t>فَصْلِي كَبِيرٌ وَمُضِيءٌ.</a:t>
@@ -22823,6 +22990,7 @@
                   <a:srgbClr val="1B3B6F"/>
                 </a:solidFill>
                 <a:latin typeface="Amiri" pitchFamily="2" charset="-78"/>
+                <a:ea typeface="Amiri" pitchFamily="2" charset="-78"/>
                 <a:cs typeface="Amiri" pitchFamily="2" charset="-78"/>
               </a:rPr>
               <a:t>صِفْ فَصْلَكَ.</a:t>
@@ -22926,6 +23094,7 @@
                   <a:srgbClr val="1B3B6F"/>
                 </a:solidFill>
                 <a:latin typeface="Amiri" pitchFamily="2" charset="-78"/>
+                <a:ea typeface="Amiri" pitchFamily="2" charset="-78"/>
                 <a:cs typeface="Amiri" pitchFamily="2" charset="-78"/>
               </a:rPr>
               <a:t>يُوجَدُ حَاسُوبٌ، وَتُوجَدُ سَبُّورَةٌ ذَكِيَّةٌ.</a:t>
@@ -23002,6 +23171,7 @@
                   <a:srgbClr val="1B3B6F"/>
                 </a:solidFill>
                 <a:latin typeface="Amiri" pitchFamily="2" charset="-78"/>
+                <a:ea typeface="Amiri" pitchFamily="2" charset="-78"/>
                 <a:cs typeface="Amiri" pitchFamily="2" charset="-78"/>
               </a:rPr>
               <a:t>مَاذَا يُوجَدُ فِي فَصْلِكَ؟</a:t>
@@ -23105,6 +23275,7 @@
                   <a:srgbClr val="1B3B6F"/>
                 </a:solidFill>
                 <a:latin typeface="Amiri" pitchFamily="2" charset="-78"/>
+                <a:ea typeface="Amiri" pitchFamily="2" charset="-78"/>
                 <a:cs typeface="Amiri" pitchFamily="2" charset="-78"/>
               </a:rPr>
               <a:t>فِي حَقِيبَتِي كُتُبٌ وَدَفَاتِرُ وَأَقْلَامٌ.</a:t>
@@ -23181,6 +23352,7 @@
                   <a:srgbClr val="1B3B6F"/>
                 </a:solidFill>
                 <a:latin typeface="Amiri" pitchFamily="2" charset="-78"/>
+                <a:ea typeface="Amiri" pitchFamily="2" charset="-78"/>
                 <a:cs typeface="Amiri" pitchFamily="2" charset="-78"/>
               </a:rPr>
               <a:t>مَاذَا فِي حَقِيبَتِكَ؟</a:t>
@@ -23284,6 +23456,7 @@
                   <a:srgbClr val="1B3B6F"/>
                 </a:solidFill>
                 <a:latin typeface="Amiri" pitchFamily="2" charset="-78"/>
+                <a:ea typeface="Amiri" pitchFamily="2" charset="-78"/>
                 <a:cs typeface="Amiri" pitchFamily="2" charset="-78"/>
               </a:rPr>
               <a:t>نَعَمْ، أَسْتَخْدِمُهُ لِلْبَحْثِ وَالوَاجِبَاتِ.</a:t>
@@ -23360,6 +23533,7 @@
                   <a:srgbClr val="1B3B6F"/>
                 </a:solidFill>
                 <a:latin typeface="Amiri" pitchFamily="2" charset="-78"/>
+                <a:ea typeface="Amiri" pitchFamily="2" charset="-78"/>
                 <a:cs typeface="Amiri" pitchFamily="2" charset="-78"/>
               </a:rPr>
               <a:t>هَلْ تَسْتَخْدِمُ الحَاسُوبَ فِي المَدْرَسَةِ؟</a:t>
@@ -23463,6 +23637,7 @@
                   <a:srgbClr val="1B3B6F"/>
                 </a:solidFill>
                 <a:latin typeface="Amiri" pitchFamily="2" charset="-78"/>
+                <a:ea typeface="Amiri" pitchFamily="2" charset="-78"/>
                 <a:cs typeface="Amiri" pitchFamily="2" charset="-78"/>
               </a:rPr>
               <a:t>لَا، الهَوَاتِفُ مَمْنُوعَةٌ فِي الفَصْلِ.</a:t>
@@ -23539,6 +23714,7 @@
                   <a:srgbClr val="1B3B6F"/>
                 </a:solidFill>
                 <a:latin typeface="Amiri" pitchFamily="2" charset="-78"/>
+                <a:ea typeface="Amiri" pitchFamily="2" charset="-78"/>
                 <a:cs typeface="Amiri" pitchFamily="2" charset="-78"/>
               </a:rPr>
               <a:t>هَلِ الهَوَاتِفُ مَسْمُوحَةٌ فِي فَصْلِكَ؟</a:t>
@@ -23748,6 +23924,7 @@
                   <a:srgbClr val="D4AF37"/>
                 </a:solidFill>
                 <a:latin typeface="Amiri" pitchFamily="2" charset="-78"/>
+                <a:ea typeface="Amiri" pitchFamily="2" charset="-78"/>
                 <a:cs typeface="Amiri" pitchFamily="2" charset="-78"/>
               </a:rPr>
               <a:t>م</a:t>
@@ -24068,6 +24245,7 @@
                   <a:srgbClr val="8A6D1E"/>
                 </a:solidFill>
                 <a:latin typeface="Amiri" pitchFamily="2" charset="-78"/>
+                <a:ea typeface="Amiri" pitchFamily="2" charset="-78"/>
                 <a:cs typeface="Amiri" pitchFamily="2" charset="-78"/>
               </a:rPr>
               <a:t>نَمُوذَجُ الإِجَابَةِ</a:t>
@@ -24310,6 +24488,7 @@
                   <a:srgbClr val="1B3B6F"/>
                 </a:solidFill>
                 <a:latin typeface="Amiri" pitchFamily="2" charset="-78"/>
+                <a:ea typeface="Amiri" pitchFamily="2" charset="-78"/>
                 <a:cs typeface="Amiri" pitchFamily="2" charset="-78"/>
               </a:rPr>
               <a:t>الأَدَاةُ الَّتِي لَا أَسْتَطِيعُ أَنْ أَدْرُسَ بِدُونِهَا هِيَ حَاسُوبِي المَحْمُولُ، لِأَنَّ كُلَّ دُرُوسِي عَلَى الإِنْتَرْنِتِ.</a:t>
@@ -24386,6 +24565,7 @@
                   <a:srgbClr val="1B3B6F"/>
                 </a:solidFill>
                 <a:latin typeface="Amiri" pitchFamily="2" charset="-78"/>
+                <a:ea typeface="Amiri" pitchFamily="2" charset="-78"/>
                 <a:cs typeface="Amiri" pitchFamily="2" charset="-78"/>
               </a:rPr>
               <a:t>مَا الأَدَاةُ الَّتِي لَا تَسْتَطِيعُ أَنْ تَدْرُسَ بِدُونِهَا؟</a:t>
@@ -24489,6 +24669,7 @@
                   <a:srgbClr val="1B3B6F"/>
                 </a:solidFill>
                 <a:latin typeface="Amiri" pitchFamily="2" charset="-78"/>
+                <a:ea typeface="Amiri" pitchFamily="2" charset="-78"/>
                 <a:cs typeface="Amiri" pitchFamily="2" charset="-78"/>
               </a:rPr>
               <a:t>كَانَ فَصْلِي مُلَوَّنًا، وَكَانَتْ عَلَى الجُدْرَانِ رُسُومَاتٌ كَثِيرَةٌ رَسَمْنَاهَا بِأَنْفُسِنَا.</a:t>
@@ -24565,6 +24746,7 @@
                   <a:srgbClr val="1B3B6F"/>
                 </a:solidFill>
                 <a:latin typeface="Amiri" pitchFamily="2" charset="-78"/>
+                <a:ea typeface="Amiri" pitchFamily="2" charset="-78"/>
                 <a:cs typeface="Amiri" pitchFamily="2" charset="-78"/>
               </a:rPr>
               <a:t>صِفْ فَصْلَكَ فِي المَدْرَسَةِ الابْتِدَائِيَّةِ.</a:t>
@@ -24668,6 +24850,7 @@
                   <a:srgbClr val="1B3B6F"/>
                 </a:solidFill>
                 <a:latin typeface="Amiri" pitchFamily="2" charset="-78"/>
+                <a:ea typeface="Amiri" pitchFamily="2" charset="-78"/>
                 <a:cs typeface="Amiri" pitchFamily="2" charset="-78"/>
               </a:rPr>
               <a:t>يَجِبُ أَنْ نَصِلَ فِي الوَقْتِ، وَمَمْنُوعٌ أَنْ نَسْتَخْدِمَ الهَوَاتِفَ دُونَ إِذْنٍ.</a:t>
@@ -24744,6 +24927,7 @@
                   <a:srgbClr val="1B3B6F"/>
                 </a:solidFill>
                 <a:latin typeface="Amiri" pitchFamily="2" charset="-78"/>
+                <a:ea typeface="Amiri" pitchFamily="2" charset="-78"/>
                 <a:cs typeface="Amiri" pitchFamily="2" charset="-78"/>
               </a:rPr>
               <a:t>مَا القَوَاعِدُ فِي فَصْلِكَ؟</a:t>
@@ -24847,6 +25031,7 @@
                   <a:srgbClr val="1B3B6F"/>
                 </a:solidFill>
                 <a:latin typeface="Amiri" pitchFamily="2" charset="-78"/>
+                <a:ea typeface="Amiri" pitchFamily="2" charset="-78"/>
                 <a:cs typeface="Amiri" pitchFamily="2" charset="-78"/>
               </a:rPr>
               <a:t>أُفَضِّلُ الوَرَقِيَّةَ لِلْقِرَاءَةِ، لِأَنَّهَا أَرْيَحُ لِلْعَيْنَيْنِ، لٰكِنَّ الإِلِكْتْرُونِيَّةَ أَخَفُّ فِي الحَقِيبَةِ.</a:t>
@@ -24923,6 +25108,7 @@
                   <a:srgbClr val="1B3B6F"/>
                 </a:solidFill>
                 <a:latin typeface="Amiri" pitchFamily="2" charset="-78"/>
+                <a:ea typeface="Amiri" pitchFamily="2" charset="-78"/>
                 <a:cs typeface="Amiri" pitchFamily="2" charset="-78"/>
               </a:rPr>
               <a:t>هَلْ تُفَضِّلُ الكُتُبَ الوَرَقِيَّةَ أَمِ الإِلِكْتْرُونِيَّةَ؟</a:t>
@@ -25026,6 +25212,7 @@
                   <a:srgbClr val="1B3B6F"/>
                 </a:solidFill>
                 <a:latin typeface="Amiri" pitchFamily="2" charset="-78"/>
+                <a:ea typeface="Amiri" pitchFamily="2" charset="-78"/>
                 <a:cs typeface="Amiri" pitchFamily="2" charset="-78"/>
               </a:rPr>
               <a:t>سَيَكُونُ فِيهِ مُعَلِّمٌ آلِيٌّ يُسَاعِدُ المُعَلِّمَ، وَسَنَدْرُسُ التَّارِيخَ بِالوَاقِعِ الافْتِرَاضِيِّ.</a:t>
@@ -25102,6 +25289,7 @@
                   <a:srgbClr val="1B3B6F"/>
                 </a:solidFill>
                 <a:latin typeface="Amiri" pitchFamily="2" charset="-78"/>
+                <a:ea typeface="Amiri" pitchFamily="2" charset="-78"/>
                 <a:cs typeface="Amiri" pitchFamily="2" charset="-78"/>
               </a:rPr>
               <a:t>كَيْفَ سَيَكُونُ فَصْلُ المُسْتَقْبَلِ؟</a:t>
@@ -25311,6 +25499,7 @@
                   <a:srgbClr val="D4AF37"/>
                 </a:solidFill>
                 <a:latin typeface="Amiri" pitchFamily="2" charset="-78"/>
+                <a:ea typeface="Amiri" pitchFamily="2" charset="-78"/>
                 <a:cs typeface="Amiri" pitchFamily="2" charset="-78"/>
               </a:rPr>
               <a:t>م</a:t>
@@ -25631,6 +25820,7 @@
                   <a:srgbClr val="8A6D1E"/>
                 </a:solidFill>
                 <a:latin typeface="Amiri" pitchFamily="2" charset="-78"/>
+                <a:ea typeface="Amiri" pitchFamily="2" charset="-78"/>
                 <a:cs typeface="Amiri" pitchFamily="2" charset="-78"/>
               </a:rPr>
               <a:t>نَمُوذَجُ الإِجَابَةِ</a:t>
@@ -25873,6 +26063,7 @@
                   <a:srgbClr val="1B3B6F"/>
                 </a:solidFill>
                 <a:latin typeface="Amiri" pitchFamily="2" charset="-78"/>
+                <a:ea typeface="Amiri" pitchFamily="2" charset="-78"/>
                 <a:cs typeface="Amiri" pitchFamily="2" charset="-78"/>
               </a:rPr>
               <a:t>مِنْ نَاحِيَةٍ، تَجْعَلُ الدُّرُوسَ تَفَاعُلِيَّةً وَمُمْتِعَةً، وَمِنْ نَاحِيَةٍ أُخْرَى، قَدْ تُشَتِّتُ الانْتِبَاهَ إِذَا لَمْ تُسْتَخْدَمْ بِحِكْمَةٍ.</a:t>
@@ -25949,6 +26140,7 @@
                   <a:srgbClr val="1B3B6F"/>
                 </a:solidFill>
                 <a:latin typeface="Amiri" pitchFamily="2" charset="-78"/>
+                <a:ea typeface="Amiri" pitchFamily="2" charset="-78"/>
                 <a:cs typeface="Amiri" pitchFamily="2" charset="-78"/>
               </a:rPr>
               <a:t>هَلْ تُسَاعِدُ التِّكْنُولُوجْيَا الطُّلَّابَ عَلَى التَّعَلُّمِ؟</a:t>
@@ -26052,6 +26244,7 @@
                   <a:srgbClr val="1B3B6F"/>
                 </a:solidFill>
                 <a:latin typeface="Amiri" pitchFamily="2" charset="-78"/>
+                <a:ea typeface="Amiri" pitchFamily="2" charset="-78"/>
                 <a:cs typeface="Amiri" pitchFamily="2" charset="-78"/>
               </a:rPr>
               <a:t>صَحِيحٌ أَنَّهَا تُشَتِّتُ الطُّلَّابَ، غَيْرَ أَنَّ المَنْعَ الكَامِلَ يَحْرِمُهُمْ مِنْ أَدَاةٍ مُفِيدَةٍ لِلْبَحْثِ؛ لِذٰلِكَ أُفَضِّلُ قَوَاعِدَ وَاضِحَةً.</a:t>
@@ -26128,6 +26321,7 @@
                   <a:srgbClr val="1B3B6F"/>
                 </a:solidFill>
                 <a:latin typeface="Amiri" pitchFamily="2" charset="-78"/>
+                <a:ea typeface="Amiri" pitchFamily="2" charset="-78"/>
                 <a:cs typeface="Amiri" pitchFamily="2" charset="-78"/>
               </a:rPr>
               <a:t>هَلْ يَجِبُ أَنْ تُمْنَعَ الهَوَاتِفُ فِي المَدَارِسِ؟</a:t>
@@ -26231,6 +26425,7 @@
                   <a:srgbClr val="1B3B6F"/>
                 </a:solidFill>
                 <a:latin typeface="Amiri" pitchFamily="2" charset="-78"/>
+                <a:ea typeface="Amiri" pitchFamily="2" charset="-78"/>
                 <a:cs typeface="Amiri" pitchFamily="2" charset="-78"/>
               </a:rPr>
               <a:t>أَوَّلًا، المُعَلِّمُ الَّذِي يُشَجِّعُ الأَسْئِلَةَ؛ بِالإِضَافَةِ إِلَى ذٰلِكَ، الهُدُوءُ وَالضَّوْءُ الطَّبِيعِيُّ وَالاحْتِرَامُ بَيْنَ الطُّلَّابِ.</a:t>
@@ -26307,6 +26502,7 @@
                   <a:srgbClr val="1B3B6F"/>
                 </a:solidFill>
                 <a:latin typeface="Amiri" pitchFamily="2" charset="-78"/>
+                <a:ea typeface="Amiri" pitchFamily="2" charset="-78"/>
                 <a:cs typeface="Amiri" pitchFamily="2" charset="-78"/>
               </a:rPr>
               <a:t>مَا الَّذِي يَجْعَلُ الفَصْلَ مَكَانًا جَيِّدًا لِلتَّعَلُّمِ؟</a:t>
@@ -26516,6 +26712,7 @@
                   <a:srgbClr val="D4AF37"/>
                 </a:solidFill>
                 <a:latin typeface="Amiri" pitchFamily="2" charset="-78"/>
+                <a:ea typeface="Amiri" pitchFamily="2" charset="-78"/>
                 <a:cs typeface="Amiri" pitchFamily="2" charset="-78"/>
               </a:rPr>
               <a:t>م</a:t>
@@ -26836,6 +27033,7 @@
                   <a:srgbClr val="8A6D1E"/>
                 </a:solidFill>
                 <a:latin typeface="Amiri" pitchFamily="2" charset="-78"/>
+                <a:ea typeface="Amiri" pitchFamily="2" charset="-78"/>
                 <a:cs typeface="Amiri" pitchFamily="2" charset="-78"/>
               </a:rPr>
               <a:t>نَمُوذَجُ الإِجَابَةِ</a:t>
@@ -27078,6 +27276,7 @@
                   <a:srgbClr val="1B3B6F"/>
                 </a:solidFill>
                 <a:latin typeface="Amiri" pitchFamily="2" charset="-78"/>
+                <a:ea typeface="Amiri" pitchFamily="2" charset="-78"/>
                 <a:cs typeface="Amiri" pitchFamily="2" charset="-78"/>
               </a:rPr>
               <a:t>كَانُوا يَبْحَثُونَ فِي المَوْسُوعَاتِ وَيَكْتُبُونَ كُلَّ شَيْءٍ بِأَيْدِيهِمْ، أَمَّا نَحْنُ فَنَجِدُ المَعْلُومَةَ فِي ثَوَانٍ.</a:t>
@@ -27154,6 +27353,7 @@
                   <a:srgbClr val="1B3B6F"/>
                 </a:solidFill>
                 <a:latin typeface="Amiri" pitchFamily="2" charset="-78"/>
+                <a:ea typeface="Amiri" pitchFamily="2" charset="-78"/>
                 <a:cs typeface="Amiri" pitchFamily="2" charset="-78"/>
               </a:rPr>
               <a:t>كَيْفَ كَانَ الطُّلَّابُ يَتَعَلَّمُونَ قَبْلَ الإِنْتَرْنِتِ؟</a:t>
@@ -27257,6 +27457,7 @@
                   <a:srgbClr val="1B3B6F"/>
                 </a:solidFill>
                 <a:latin typeface="Amiri" pitchFamily="2" charset="-78"/>
+                <a:ea typeface="Amiri" pitchFamily="2" charset="-78"/>
                 <a:cs typeface="Amiri" pitchFamily="2" charset="-78"/>
               </a:rPr>
               <a:t>لَوْ صَمَّمْتُهُ، لَجَعَلْتُ فِيهِ نَوَافِذَ كَبِيرَةً، وَطَاوِلَاتٍ دَائِرِيَّةً لِلْعَمَلِ الجَمَاعِيِّ، وَزَاوِيَةً هَادِئَةً لِلْقِرَاءَةِ.</a:t>
@@ -27333,6 +27534,7 @@
                   <a:srgbClr val="1B3B6F"/>
                 </a:solidFill>
                 <a:latin typeface="Amiri" pitchFamily="2" charset="-78"/>
+                <a:ea typeface="Amiri" pitchFamily="2" charset="-78"/>
                 <a:cs typeface="Amiri" pitchFamily="2" charset="-78"/>
               </a:rPr>
               <a:t>لَوْ صَمَّمْتَ فَصْلًا مِثَالِيًّا، كَيْفَ يَكُونُ؟</a:t>
@@ -27542,6 +27744,7 @@
                   <a:srgbClr val="D4AF37"/>
                 </a:solidFill>
                 <a:latin typeface="Amiri" pitchFamily="2" charset="-78"/>
+                <a:ea typeface="Amiri" pitchFamily="2" charset="-78"/>
                 <a:cs typeface="Amiri" pitchFamily="2" charset="-78"/>
               </a:rPr>
               <a:t>م</a:t>
@@ -27862,6 +28065,7 @@
                   <a:srgbClr val="8A6D1E"/>
                 </a:solidFill>
                 <a:latin typeface="Amiri" pitchFamily="2" charset="-78"/>
+                <a:ea typeface="Amiri" pitchFamily="2" charset="-78"/>
                 <a:cs typeface="Amiri" pitchFamily="2" charset="-78"/>
               </a:rPr>
               <a:t>قَيِّمْ عَمَلَكَ</a:t>
@@ -29106,6 +29310,7 @@
                   <a:srgbClr val="FFFFFF"/>
                 </a:solidFill>
                 <a:latin typeface="Amiri" pitchFamily="2" charset="-78"/>
+                <a:ea typeface="Amiri" pitchFamily="2" charset="-78"/>
                 <a:cs typeface="Amiri" pitchFamily="2" charset="-78"/>
               </a:rPr>
               <a:t>أَحْسَنْتُمْ! إِلَى اللِّقَاءِ</a:t>
@@ -29258,6 +29463,7 @@
                   <a:srgbClr val="D4AF37"/>
                 </a:solidFill>
                 <a:latin typeface="Amiri" pitchFamily="2" charset="-78"/>
+                <a:ea typeface="Amiri" pitchFamily="2" charset="-78"/>
                 <a:cs typeface="Amiri" pitchFamily="2" charset="-78"/>
               </a:rPr>
               <a:t>وَرْشَةُ الكِتَابَةِ</a:t>
@@ -29391,6 +29597,7 @@
                   <a:srgbClr val="D4AF37"/>
                 </a:solidFill>
                 <a:latin typeface="Amiri" pitchFamily="2" charset="-78"/>
+                <a:ea typeface="Amiri" pitchFamily="2" charset="-78"/>
                 <a:cs typeface="Amiri" pitchFamily="2" charset="-78"/>
               </a:rPr>
               <a:t>م</a:t>
@@ -29711,6 +29918,7 @@
                   <a:srgbClr val="8A6D1E"/>
                 </a:solidFill>
                 <a:latin typeface="Amiri" pitchFamily="2" charset="-78"/>
+                <a:ea typeface="Amiri" pitchFamily="2" charset="-78"/>
                 <a:cs typeface="Amiri" pitchFamily="2" charset="-78"/>
               </a:rPr>
               <a:t>خَرِيطَةُ الوَرْشَةِ</a:t>
@@ -30025,6 +30233,7 @@
                   <a:srgbClr val="1B3B6F"/>
                 </a:solidFill>
                 <a:latin typeface="Amiri" pitchFamily="2" charset="-78"/>
+                <a:ea typeface="Amiri" pitchFamily="2" charset="-78"/>
                 <a:cs typeface="Amiri" pitchFamily="2" charset="-78"/>
               </a:rPr>
               <a:t>كَيْفَ</a:t>
@@ -30301,6 +30510,7 @@
                   <a:srgbClr val="1E6B52"/>
                 </a:solidFill>
                 <a:latin typeface="Amiri" pitchFamily="2" charset="-78"/>
+                <a:ea typeface="Amiri" pitchFamily="2" charset="-78"/>
                 <a:cs typeface="Amiri" pitchFamily="2" charset="-78"/>
               </a:rPr>
               <a:t>تَمْثِيلُ الدَّوْرِ</a:t>
@@ -30577,6 +30787,7 @@
                   <a:srgbClr val="8A6D1E"/>
                 </a:solidFill>
                 <a:latin typeface="Amiri" pitchFamily="2" charset="-78"/>
+                <a:ea typeface="Amiri" pitchFamily="2" charset="-78"/>
                 <a:cs typeface="Amiri" pitchFamily="2" charset="-78"/>
               </a:rPr>
               <a:t>النَّمُوذَجُ</a:t>
@@ -30853,6 +31064,7 @@
                   <a:srgbClr val="1E6B52"/>
                 </a:solidFill>
                 <a:latin typeface="Amiri" pitchFamily="2" charset="-78"/>
+                <a:ea typeface="Amiri" pitchFamily="2" charset="-78"/>
                 <a:cs typeface="Amiri" pitchFamily="2" charset="-78"/>
               </a:rPr>
               <a:t>المُحَادَثَةُ</a:t>
@@ -31129,6 +31341,7 @@
                   <a:srgbClr val="8A6D1E"/>
                 </a:solidFill>
                 <a:latin typeface="Amiri" pitchFamily="2" charset="-78"/>
+                <a:ea typeface="Amiri" pitchFamily="2" charset="-78"/>
                 <a:cs typeface="Amiri" pitchFamily="2" charset="-78"/>
               </a:rPr>
               <a:t>قَيِّمْ</a:t>
@@ -31372,6 +31585,7 @@
                   <a:srgbClr val="D4AF37"/>
                 </a:solidFill>
                 <a:latin typeface="Amiri" pitchFamily="2" charset="-78"/>
+                <a:ea typeface="Amiri" pitchFamily="2" charset="-78"/>
                 <a:cs typeface="Amiri" pitchFamily="2" charset="-78"/>
               </a:rPr>
               <a:t>م</a:t>
@@ -31692,6 +31906,7 @@
                   <a:srgbClr val="8A6D1E"/>
                 </a:solidFill>
                 <a:latin typeface="Amiri" pitchFamily="2" charset="-78"/>
+                <a:ea typeface="Amiri" pitchFamily="2" charset="-78"/>
                 <a:cs typeface="Amiri" pitchFamily="2" charset="-78"/>
               </a:rPr>
               <a:t>امْتِحَانُ التَّحَدُّثِ</a:t>
@@ -32316,6 +32531,7 @@
                   <a:srgbClr val="1B3B6F"/>
                 </a:solidFill>
                 <a:latin typeface="Amiri" pitchFamily="2" charset="-78"/>
+                <a:ea typeface="Amiri" pitchFamily="2" charset="-78"/>
                 <a:cs typeface="Amiri" pitchFamily="2" charset="-78"/>
               </a:rPr>
               <a:t>عَفْوًا، هَلْ يُمْكِنُ أَنْ تُعِيدَ السُّؤَالَ؟</a:t>
@@ -32415,6 +32631,7 @@
                   <a:srgbClr val="1B3B6F"/>
                 </a:solidFill>
                 <a:latin typeface="Amiri" pitchFamily="2" charset="-78"/>
+                <a:ea typeface="Amiri" pitchFamily="2" charset="-78"/>
                 <a:cs typeface="Amiri" pitchFamily="2" charset="-78"/>
               </a:rPr>
               <a:t>لَحْظَةً، دَعْنِي أُفَكِّرُ …</a:t>
@@ -32514,6 +32731,7 @@
                   <a:srgbClr val="1B3B6F"/>
                 </a:solidFill>
                 <a:latin typeface="Amiri" pitchFamily="2" charset="-78"/>
+                <a:ea typeface="Amiri" pitchFamily="2" charset="-78"/>
                 <a:cs typeface="Amiri" pitchFamily="2" charset="-78"/>
               </a:rPr>
               <a:t>أَقْصِدُ …</a:t>
@@ -32685,6 +32903,7 @@
                   <a:srgbClr val="D4AF37"/>
                 </a:solidFill>
                 <a:latin typeface="Amiri" pitchFamily="2" charset="-78"/>
+                <a:ea typeface="Amiri" pitchFamily="2" charset="-78"/>
                 <a:cs typeface="Amiri" pitchFamily="2" charset="-78"/>
               </a:rPr>
               <a:t>م</a:t>
@@ -33005,6 +33224,7 @@
                   <a:srgbClr val="8A6D1E"/>
                 </a:solidFill>
                 <a:latin typeface="Amiri" pitchFamily="2" charset="-78"/>
+                <a:ea typeface="Amiri" pitchFamily="2" charset="-78"/>
                 <a:cs typeface="Amiri" pitchFamily="2" charset="-78"/>
               </a:rPr>
               <a:t>فِي الفَصْلِ</a:t>
@@ -33308,6 +33528,7 @@
                   <a:srgbClr val="1B3B6F"/>
                 </a:solidFill>
                 <a:latin typeface="Amiri" pitchFamily="2" charset="-78"/>
+                <a:ea typeface="Amiri" pitchFamily="2" charset="-78"/>
                 <a:cs typeface="Amiri" pitchFamily="2" charset="-78"/>
               </a:rPr>
               <a:t>فَصْلٌ · صَفٌّ</a:t>
@@ -33465,6 +33686,7 @@
                   <a:srgbClr val="1B3B6F"/>
                 </a:solidFill>
                 <a:latin typeface="Amiri" pitchFamily="2" charset="-78"/>
+                <a:ea typeface="Amiri" pitchFamily="2" charset="-78"/>
                 <a:cs typeface="Amiri" pitchFamily="2" charset="-78"/>
               </a:rPr>
               <a:t>فَصْلٌ مُضِيءٌ</a:t>
@@ -33568,6 +33790,7 @@
                   <a:srgbClr val="1B3B6F"/>
                 </a:solidFill>
                 <a:latin typeface="Amiri" pitchFamily="2" charset="-78"/>
+                <a:ea typeface="Amiri" pitchFamily="2" charset="-78"/>
                 <a:cs typeface="Amiri" pitchFamily="2" charset="-78"/>
               </a:rPr>
               <a:t>فُصُولٌ · صُفُوفٌ</a:t>
@@ -33833,6 +34056,7 @@
                   <a:srgbClr val="1B3B6F"/>
                 </a:solidFill>
                 <a:latin typeface="Amiri" pitchFamily="2" charset="-78"/>
+                <a:ea typeface="Amiri" pitchFamily="2" charset="-78"/>
                 <a:cs typeface="Amiri" pitchFamily="2" charset="-78"/>
               </a:rPr>
               <a:t>سَبُّورَةٌ</a:t>
@@ -33990,6 +34214,7 @@
                   <a:srgbClr val="1B3B6F"/>
                 </a:solidFill>
                 <a:latin typeface="Amiri" pitchFamily="2" charset="-78"/>
+                <a:ea typeface="Amiri" pitchFamily="2" charset="-78"/>
                 <a:cs typeface="Amiri" pitchFamily="2" charset="-78"/>
               </a:rPr>
               <a:t>سَبُّورَاتٌ</a:t>
@@ -34093,6 +34318,7 @@
                   <a:srgbClr val="1B3B6F"/>
                 </a:solidFill>
                 <a:latin typeface="Amiri" pitchFamily="2" charset="-78"/>
+                <a:ea typeface="Amiri" pitchFamily="2" charset="-78"/>
                 <a:cs typeface="Amiri" pitchFamily="2" charset="-78"/>
               </a:rPr>
               <a:t>سَبُّورَةٌ ذَكِيَّةٌ</a:t>
@@ -34358,6 +34584,7 @@
                   <a:srgbClr val="1B3B6F"/>
                 </a:solidFill>
                 <a:latin typeface="Amiri" pitchFamily="2" charset="-78"/>
+                <a:ea typeface="Amiri" pitchFamily="2" charset="-78"/>
                 <a:cs typeface="Amiri" pitchFamily="2" charset="-78"/>
               </a:rPr>
               <a:t>مَقْعَدٌ · طَاوِلَةٌ</a:t>
@@ -34515,6 +34742,7 @@
                   <a:srgbClr val="1B3B6F"/>
                 </a:solidFill>
                 <a:latin typeface="Amiri" pitchFamily="2" charset="-78"/>
+                <a:ea typeface="Amiri" pitchFamily="2" charset="-78"/>
                 <a:cs typeface="Amiri" pitchFamily="2" charset="-78"/>
               </a:rPr>
               <a:t>مَقَاعِدُ · طَاوِلَاتٌ</a:t>
@@ -34780,6 +35008,7 @@
                   <a:srgbClr val="1B3B6F"/>
                 </a:solidFill>
                 <a:latin typeface="Amiri" pitchFamily="2" charset="-78"/>
+                <a:ea typeface="Amiri" pitchFamily="2" charset="-78"/>
                 <a:cs typeface="Amiri" pitchFamily="2" charset="-78"/>
               </a:rPr>
               <a:t>دَفْتَرٌ · كِتَابٌ</a:t>
@@ -34937,6 +35166,7 @@
                   <a:srgbClr val="1B3B6F"/>
                 </a:solidFill>
                 <a:latin typeface="Amiri" pitchFamily="2" charset="-78"/>
+                <a:ea typeface="Amiri" pitchFamily="2" charset="-78"/>
                 <a:cs typeface="Amiri" pitchFamily="2" charset="-78"/>
               </a:rPr>
               <a:t>دَفَاتِرُ · كُتُبٌ</a:t>
@@ -35202,6 +35432,7 @@
                   <a:srgbClr val="1B3B6F"/>
                 </a:solidFill>
                 <a:latin typeface="Amiri" pitchFamily="2" charset="-78"/>
+                <a:ea typeface="Amiri" pitchFamily="2" charset="-78"/>
                 <a:cs typeface="Amiri" pitchFamily="2" charset="-78"/>
               </a:rPr>
               <a:t>قَلَمٌ · مِمْحَاةٌ · مِسْطَرَةٌ</a:t>
@@ -35359,6 +35590,7 @@
                   <a:srgbClr val="1B3B6F"/>
                 </a:solidFill>
                 <a:latin typeface="Amiri" pitchFamily="2" charset="-78"/>
+                <a:ea typeface="Amiri" pitchFamily="2" charset="-78"/>
                 <a:cs typeface="Amiri" pitchFamily="2" charset="-78"/>
               </a:rPr>
               <a:t>أَقْلَامٌ · مَمَاحٍ · مَسَاطِرُ</a:t>
@@ -35624,6 +35856,7 @@
                   <a:srgbClr val="1B3B6F"/>
                 </a:solidFill>
                 <a:latin typeface="Amiri" pitchFamily="2" charset="-78"/>
+                <a:ea typeface="Amiri" pitchFamily="2" charset="-78"/>
                 <a:cs typeface="Amiri" pitchFamily="2" charset="-78"/>
               </a:rPr>
               <a:t>حَاسُوبٌ لَوْحِيٌّ</a:t>
@@ -35781,6 +36014,7 @@
                   <a:srgbClr val="1B3B6F"/>
                 </a:solidFill>
                 <a:latin typeface="Amiri" pitchFamily="2" charset="-78"/>
+                <a:ea typeface="Amiri" pitchFamily="2" charset="-78"/>
                 <a:cs typeface="Amiri" pitchFamily="2" charset="-78"/>
               </a:rPr>
               <a:t>حَاسُوبٌ مَحْمُولٌ</a:t>
@@ -35884,6 +36118,7 @@
                   <a:srgbClr val="1B3B6F"/>
                 </a:solidFill>
                 <a:latin typeface="Amiri" pitchFamily="2" charset="-78"/>
+                <a:ea typeface="Amiri" pitchFamily="2" charset="-78"/>
                 <a:cs typeface="Amiri" pitchFamily="2" charset="-78"/>
               </a:rPr>
               <a:t>حَوَاسِيبُ لَوْحِيَّةٌ</a:t>
@@ -36017,6 +36252,7 @@
                   <a:srgbClr val="D4AF37"/>
                 </a:solidFill>
                 <a:latin typeface="Amiri" pitchFamily="2" charset="-78"/>
+                <a:ea typeface="Amiri" pitchFamily="2" charset="-78"/>
                 <a:cs typeface="Amiri" pitchFamily="2" charset="-78"/>
               </a:rPr>
               <a:t>م</a:t>
@@ -36337,6 +36573,7 @@
                   <a:srgbClr val="8A6D1E"/>
                 </a:solidFill>
                 <a:latin typeface="Amiri" pitchFamily="2" charset="-78"/>
+                <a:ea typeface="Amiri" pitchFamily="2" charset="-78"/>
                 <a:cs typeface="Amiri" pitchFamily="2" charset="-78"/>
               </a:rPr>
               <a:t>هٰذَا الَّذِي …</a:t>
@@ -36640,6 +36877,7 @@
                   <a:srgbClr val="1B3B6F"/>
                 </a:solidFill>
                 <a:latin typeface="Amiri" pitchFamily="2" charset="-78"/>
+                <a:ea typeface="Amiri" pitchFamily="2" charset="-78"/>
                 <a:cs typeface="Amiri" pitchFamily="2" charset="-78"/>
               </a:rPr>
               <a:t>هٰذَا · هٰذِهِ</a:t>
@@ -36797,6 +37035,7 @@
                   <a:srgbClr val="1B3B6F"/>
                 </a:solidFill>
                 <a:latin typeface="Amiri" pitchFamily="2" charset="-78"/>
+                <a:ea typeface="Amiri" pitchFamily="2" charset="-78"/>
                 <a:cs typeface="Amiri" pitchFamily="2" charset="-78"/>
               </a:rPr>
               <a:t>هٰذِهِ</a:t>
@@ -36900,6 +37139,7 @@
                   <a:srgbClr val="1B3B6F"/>
                 </a:solidFill>
                 <a:latin typeface="Amiri" pitchFamily="2" charset="-78"/>
+                <a:ea typeface="Amiri" pitchFamily="2" charset="-78"/>
                 <a:cs typeface="Amiri" pitchFamily="2" charset="-78"/>
               </a:rPr>
               <a:t>هٰؤُلَاءِ</a:t>
@@ -37165,6 +37405,7 @@
                   <a:srgbClr val="1B3B6F"/>
                 </a:solidFill>
                 <a:latin typeface="Amiri" pitchFamily="2" charset="-78"/>
+                <a:ea typeface="Amiri" pitchFamily="2" charset="-78"/>
                 <a:cs typeface="Amiri" pitchFamily="2" charset="-78"/>
               </a:rPr>
               <a:t>الَّذِي · الَّتِي</a:t>
@@ -37214,11 +37455,12 @@
               <a:buNone/>
             </a:pPr>
             <a:r>
-              <a:rPr lang="en-US" sz="1100" i="1" dirty="0">
+              <a:rPr lang="ar-SA" sz="1100" i="1" dirty="0">
                 <a:solidFill>
                   <a:srgbClr val="5A6472"/>
                 </a:solidFill>
                 <a:latin typeface="Calibri" pitchFamily="34" charset="0"/>
+                <a:ea typeface="Amiri" pitchFamily="2" charset="-78"/>
                 <a:cs typeface="Amiri" pitchFamily="2" charset="-78"/>
               </a:rPr>
               <a:t>al-َ-dhī · al-َ-tī</a:t>
@@ -37322,6 +37564,7 @@
                   <a:srgbClr val="1B3B6F"/>
                 </a:solidFill>
                 <a:latin typeface="Amiri" pitchFamily="2" charset="-78"/>
+                <a:ea typeface="Amiri" pitchFamily="2" charset="-78"/>
                 <a:cs typeface="Amiri" pitchFamily="2" charset="-78"/>
               </a:rPr>
               <a:t>الَّذِينَ</a:t>
@@ -37425,6 +37668,7 @@
                   <a:srgbClr val="1B3B6F"/>
                 </a:solidFill>
                 <a:latin typeface="Amiri" pitchFamily="2" charset="-78"/>
+                <a:ea typeface="Amiri" pitchFamily="2" charset="-78"/>
                 <a:cs typeface="Amiri" pitchFamily="2" charset="-78"/>
               </a:rPr>
               <a:t>الحَاسُوبُ الَّذِي نَسْتَخْدِمُهُ</a:t>
@@ -37690,6 +37934,7 @@
                   <a:srgbClr val="1B3B6F"/>
                 </a:solidFill>
                 <a:latin typeface="Amiri" pitchFamily="2" charset="-78"/>
+                <a:ea typeface="Amiri" pitchFamily="2" charset="-78"/>
                 <a:cs typeface="Amiri" pitchFamily="2" charset="-78"/>
               </a:rPr>
               <a:t>أَسْتَخْدِمُ … لِلدِّرَاسَةِ</a:t>
@@ -37847,6 +38092,7 @@
                   <a:srgbClr val="1B3B6F"/>
                 </a:solidFill>
                 <a:latin typeface="Amiri" pitchFamily="2" charset="-78"/>
+                <a:ea typeface="Amiri" pitchFamily="2" charset="-78"/>
                 <a:cs typeface="Amiri" pitchFamily="2" charset="-78"/>
               </a:rPr>
               <a:t>اسْتِخْدَامٌ</a:t>
@@ -37950,6 +38196,7 @@
                   <a:srgbClr val="1B3B6F"/>
                 </a:solidFill>
                 <a:latin typeface="Amiri" pitchFamily="2" charset="-78"/>
+                <a:ea typeface="Amiri" pitchFamily="2" charset="-78"/>
                 <a:cs typeface="Amiri" pitchFamily="2" charset="-78"/>
               </a:rPr>
               <a:t>يَسْتَخْدِمُ · تَسْتَخْدِمُ</a:t>
@@ -38215,6 +38462,7 @@
                   <a:srgbClr val="1B3B6F"/>
                 </a:solidFill>
                 <a:latin typeface="Amiri" pitchFamily="2" charset="-78"/>
+                <a:ea typeface="Amiri" pitchFamily="2" charset="-78"/>
                 <a:cs typeface="Amiri" pitchFamily="2" charset="-78"/>
               </a:rPr>
               <a:t>قَاعِدَةٌ</a:t>
@@ -38372,6 +38620,7 @@
                   <a:srgbClr val="1B3B6F"/>
                 </a:solidFill>
                 <a:latin typeface="Amiri" pitchFamily="2" charset="-78"/>
+                <a:ea typeface="Amiri" pitchFamily="2" charset="-78"/>
                 <a:cs typeface="Amiri" pitchFamily="2" charset="-78"/>
               </a:rPr>
               <a:t>مَسْمُوحٌ</a:t>
@@ -38475,6 +38724,7 @@
                   <a:srgbClr val="1B3B6F"/>
                 </a:solidFill>
                 <a:latin typeface="Amiri" pitchFamily="2" charset="-78"/>
+                <a:ea typeface="Amiri" pitchFamily="2" charset="-78"/>
                 <a:cs typeface="Amiri" pitchFamily="2" charset="-78"/>
               </a:rPr>
               <a:t>مَمْنُوعٌ</a:t>
@@ -38578,6 +38828,7 @@
                   <a:srgbClr val="1B3B6F"/>
                 </a:solidFill>
                 <a:latin typeface="Amiri" pitchFamily="2" charset="-78"/>
+                <a:ea typeface="Amiri" pitchFamily="2" charset="-78"/>
                 <a:cs typeface="Amiri" pitchFamily="2" charset="-78"/>
               </a:rPr>
               <a:t>قَوَاعِدُ</a:t>
@@ -38843,6 +39094,7 @@
                   <a:srgbClr val="1B3B6F"/>
                 </a:solidFill>
                 <a:latin typeface="Amiri" pitchFamily="2" charset="-78"/>
+                <a:ea typeface="Amiri" pitchFamily="2" charset="-78"/>
                 <a:cs typeface="Amiri" pitchFamily="2" charset="-78"/>
               </a:rPr>
               <a:t>وَاجِبٌ مَنْزِلِيٌّ</a:t>
@@ -39000,6 +39252,7 @@
                   <a:srgbClr val="1B3B6F"/>
                 </a:solidFill>
                 <a:latin typeface="Amiri" pitchFamily="2" charset="-78"/>
+                <a:ea typeface="Amiri" pitchFamily="2" charset="-78"/>
                 <a:cs typeface="Amiri" pitchFamily="2" charset="-78"/>
               </a:rPr>
               <a:t>يُسَلِّمُ</a:t>
@@ -39103,6 +39356,7 @@
                   <a:srgbClr val="1B3B6F"/>
                 </a:solidFill>
                 <a:latin typeface="Amiri" pitchFamily="2" charset="-78"/>
+                <a:ea typeface="Amiri" pitchFamily="2" charset="-78"/>
                 <a:cs typeface="Amiri" pitchFamily="2" charset="-78"/>
               </a:rPr>
               <a:t>وَاجِبَاتٌ مَنْزِلِيَّةٌ</a:t>
@@ -39368,6 +39622,7 @@
                   <a:srgbClr val="1B3B6F"/>
                 </a:solidFill>
                 <a:latin typeface="Amiri" pitchFamily="2" charset="-78"/>
+                <a:ea typeface="Amiri" pitchFamily="2" charset="-78"/>
                 <a:cs typeface="Amiri" pitchFamily="2" charset="-78"/>
               </a:rPr>
               <a:t>مِنَصَّةٌ تَعْلِيمِيَّةٌ</a:t>
@@ -39525,6 +39780,7 @@
                   <a:srgbClr val="1B3B6F"/>
                 </a:solidFill>
                 <a:latin typeface="Amiri" pitchFamily="2" charset="-78"/>
+                <a:ea typeface="Amiri" pitchFamily="2" charset="-78"/>
                 <a:cs typeface="Amiri" pitchFamily="2" charset="-78"/>
               </a:rPr>
               <a:t>يَرْفَعُ</a:t>
@@ -39628,6 +39884,7 @@
                   <a:srgbClr val="1B3B6F"/>
                 </a:solidFill>
                 <a:latin typeface="Amiri" pitchFamily="2" charset="-78"/>
+                <a:ea typeface="Amiri" pitchFamily="2" charset="-78"/>
                 <a:cs typeface="Amiri" pitchFamily="2" charset="-78"/>
               </a:rPr>
               <a:t>مِنَصَّاتٌ تَعْلِيمِيَّةٌ</a:t>
@@ -39761,6 +40018,7 @@
                   <a:srgbClr val="D4AF37"/>
                 </a:solidFill>
                 <a:latin typeface="Amiri" pitchFamily="2" charset="-78"/>
+                <a:ea typeface="Amiri" pitchFamily="2" charset="-78"/>
                 <a:cs typeface="Amiri" pitchFamily="2" charset="-78"/>
               </a:rPr>
               <a:t>م</a:t>
@@ -40081,6 +40339,7 @@
                   <a:srgbClr val="8A6D1E"/>
                 </a:solidFill>
                 <a:latin typeface="Amiri" pitchFamily="2" charset="-78"/>
+                <a:ea typeface="Amiri" pitchFamily="2" charset="-78"/>
                 <a:cs typeface="Amiri" pitchFamily="2" charset="-78"/>
               </a:rPr>
               <a:t>فِي الغُرَفِ</a:t>
@@ -41257,6 +41516,7 @@
                   <a:srgbClr val="1B3B6F"/>
                 </a:solidFill>
                 <a:latin typeface="Amiri" pitchFamily="2" charset="-78"/>
+                <a:ea typeface="Amiri" pitchFamily="2" charset="-78"/>
                 <a:cs typeface="Amiri" pitchFamily="2" charset="-78"/>
               </a:rPr>
               <a:t>دَوْرُكَ!</a:t>
@@ -41333,6 +41593,7 @@
                   <a:srgbClr val="1B3B6F"/>
                 </a:solidFill>
                 <a:latin typeface="Amiri" pitchFamily="2" charset="-78"/>
+                <a:ea typeface="Amiri" pitchFamily="2" charset="-78"/>
                 <a:cs typeface="Amiri" pitchFamily="2" charset="-78"/>
               </a:rPr>
               <a:t>أَحْسَنْتَ! / أَحْسَنْتِ!</a:t>
@@ -41409,6 +41670,7 @@
                   <a:srgbClr val="1B3B6F"/>
                 </a:solidFill>
                 <a:latin typeface="Amiri" pitchFamily="2" charset="-78"/>
+                <a:ea typeface="Amiri" pitchFamily="2" charset="-78"/>
                 <a:cs typeface="Amiri" pitchFamily="2" charset="-78"/>
               </a:rPr>
               <a:t>تَكَلَّمْ أَكْثَرَ، مِنْ فَضْلِكَ</a:t>
@@ -41485,6 +41747,7 @@
                   <a:srgbClr val="1B3B6F"/>
                 </a:solidFill>
                 <a:latin typeface="Amiri" pitchFamily="2" charset="-78"/>
+                <a:ea typeface="Amiri" pitchFamily="2" charset="-78"/>
                 <a:cs typeface="Amiri" pitchFamily="2" charset="-78"/>
               </a:rPr>
               <a:t>لِمَاذَا؟</a:t>
@@ -41656,6 +41919,7 @@
                   <a:srgbClr val="D4AF37"/>
                 </a:solidFill>
                 <a:latin typeface="Amiri" pitchFamily="2" charset="-78"/>
+                <a:ea typeface="Amiri" pitchFamily="2" charset="-78"/>
                 <a:cs typeface="Amiri" pitchFamily="2" charset="-78"/>
               </a:rPr>
               <a:t>م</a:t>
@@ -41976,6 +42240,7 @@
                   <a:srgbClr val="8A6D1E"/>
                 </a:solidFill>
                 <a:latin typeface="Amiri" pitchFamily="2" charset="-78"/>
+                <a:ea typeface="Amiri" pitchFamily="2" charset="-78"/>
                 <a:cs typeface="Amiri" pitchFamily="2" charset="-78"/>
               </a:rPr>
               <a:t>فِي مَكْتَبَةِ القِرْطَاسِيَّةِ</a:t>
@@ -42256,6 +42521,7 @@
                   <a:srgbClr val="1B3B6F"/>
                 </a:solidFill>
                 <a:latin typeface="Amiri" pitchFamily="2" charset="-78"/>
+                <a:ea typeface="Amiri" pitchFamily="2" charset="-78"/>
                 <a:cs typeface="Amiri" pitchFamily="2" charset="-78"/>
               </a:rPr>
               <a:t>أَحْتَاجُ إِلَى … وَ…</a:t>
@@ -42332,6 +42598,7 @@
                   <a:srgbClr val="1B3B6F"/>
                 </a:solidFill>
                 <a:latin typeface="Amiri" pitchFamily="2" charset="-78"/>
+                <a:ea typeface="Amiri" pitchFamily="2" charset="-78"/>
                 <a:cs typeface="Amiri" pitchFamily="2" charset="-78"/>
               </a:rPr>
               <a:t>أَهْلًا! مَاذَا تَحْتَاجُ لِلْمَدْرَسَةِ؟</a:t>
@@ -42500,6 +42767,7 @@
                   <a:srgbClr val="1B3B6F"/>
                 </a:solidFill>
                 <a:latin typeface="Amiri" pitchFamily="2" charset="-78"/>
+                <a:ea typeface="Amiri" pitchFamily="2" charset="-78"/>
                 <a:cs typeface="Amiri" pitchFamily="2" charset="-78"/>
               </a:rPr>
               <a:t>أُرِيدُ هٰذَا … لِأَنَّهُ …</a:t>
@@ -42576,6 +42844,7 @@
                   <a:srgbClr val="1B3B6F"/>
                 </a:solidFill>
                 <a:latin typeface="Amiri" pitchFamily="2" charset="-78"/>
+                <a:ea typeface="Amiri" pitchFamily="2" charset="-78"/>
                 <a:cs typeface="Amiri" pitchFamily="2" charset="-78"/>
               </a:rPr>
               <a:t>هٰذَا الدَّفْتَرُ كَبِيرٌ، وَهٰذَا صَغِيرٌ.</a:t>
@@ -42744,6 +43013,7 @@
                   <a:srgbClr val="1B3B6F"/>
                 </a:solidFill>
                 <a:latin typeface="Amiri" pitchFamily="2" charset="-78"/>
+                <a:ea typeface="Amiri" pitchFamily="2" charset="-78"/>
                 <a:cs typeface="Amiri" pitchFamily="2" charset="-78"/>
               </a:rPr>
               <a:t>نَعَمْ، هَلْ عِنْدَكَ … ؟</a:t>
@@ -42820,6 +43090,7 @@
                   <a:srgbClr val="1B3B6F"/>
                 </a:solidFill>
                 <a:latin typeface="Amiri" pitchFamily="2" charset="-78"/>
+                <a:ea typeface="Amiri" pitchFamily="2" charset="-78"/>
                 <a:cs typeface="Amiri" pitchFamily="2" charset="-78"/>
               </a:rPr>
               <a:t>هَلْ تَحْتَاجُ إِلَى مِسْطَرَةٍ؟</a:t>
@@ -42988,6 +43259,7 @@
                   <a:srgbClr val="1B3B6F"/>
                 </a:solidFill>
                 <a:latin typeface="Amiri" pitchFamily="2" charset="-78"/>
+                <a:ea typeface="Amiri" pitchFamily="2" charset="-78"/>
                 <a:cs typeface="Amiri" pitchFamily="2" charset="-78"/>
               </a:rPr>
               <a:t>كَمْ …؟</a:t>
@@ -43064,6 +43336,7 @@
                   <a:srgbClr val="1B3B6F"/>
                 </a:solidFill>
                 <a:latin typeface="Amiri" pitchFamily="2" charset="-78"/>
+                <a:ea typeface="Amiri" pitchFamily="2" charset="-78"/>
                 <a:cs typeface="Amiri" pitchFamily="2" charset="-78"/>
               </a:rPr>
               <a:t>نَعَمْ، تَفَضَّلْ.</a:t>
@@ -43232,6 +43505,7 @@
                   <a:srgbClr val="1B3B6F"/>
                 </a:solidFill>
                 <a:latin typeface="Amiri" pitchFamily="2" charset="-78"/>
+                <a:ea typeface="Amiri" pitchFamily="2" charset="-78"/>
                 <a:cs typeface="Amiri" pitchFamily="2" charset="-78"/>
               </a:rPr>
               <a:t>مَادَّتِي المُفَضَّلَةُ … لِأَنَّ …</a:t>
@@ -43308,6 +43582,7 @@
                   <a:srgbClr val="1B3B6F"/>
                 </a:solidFill>
                 <a:latin typeface="Amiri" pitchFamily="2" charset="-78"/>
+                <a:ea typeface="Amiri" pitchFamily="2" charset="-78"/>
                 <a:cs typeface="Amiri" pitchFamily="2" charset="-78"/>
               </a:rPr>
               <a:t>مَا مَادَّتُكَ المُفَضَّلَةُ؟</a:t>
@@ -43582,6 +43857,7 @@
                   <a:srgbClr val="D4AF37"/>
                 </a:solidFill>
                 <a:latin typeface="Amiri" pitchFamily="2" charset="-78"/>
+                <a:ea typeface="Amiri" pitchFamily="2" charset="-78"/>
                 <a:cs typeface="Amiri" pitchFamily="2" charset="-78"/>
               </a:rPr>
               <a:t>م</a:t>
@@ -43902,6 +44178,7 @@
                   <a:srgbClr val="8A6D1E"/>
                 </a:solidFill>
                 <a:latin typeface="Amiri" pitchFamily="2" charset="-78"/>
+                <a:ea typeface="Amiri" pitchFamily="2" charset="-78"/>
                 <a:cs typeface="Amiri" pitchFamily="2" charset="-78"/>
               </a:rPr>
               <a:t>جَوْلَةٌ فِي الفَصْلِ</a:t>
@@ -44182,6 +44459,7 @@
                   <a:srgbClr val="1B3B6F"/>
                 </a:solidFill>
                 <a:latin typeface="Amiri" pitchFamily="2" charset="-78"/>
+                <a:ea typeface="Amiri" pitchFamily="2" charset="-78"/>
                 <a:cs typeface="Amiri" pitchFamily="2" charset="-78"/>
               </a:rPr>
               <a:t>هٰذَا فَصْلُ …</a:t>
@@ -44258,6 +44536,7 @@
                   <a:srgbClr val="1B3B6F"/>
                 </a:solidFill>
                 <a:latin typeface="Amiri" pitchFamily="2" charset="-78"/>
+                <a:ea typeface="Amiri" pitchFamily="2" charset="-78"/>
                 <a:cs typeface="Amiri" pitchFamily="2" charset="-78"/>
               </a:rPr>
               <a:t>مَا هٰذَا الفَصْلُ؟</a:t>
@@ -44426,6 +44705,7 @@
                   <a:srgbClr val="1B3B6F"/>
                 </a:solidFill>
                 <a:latin typeface="Amiri" pitchFamily="2" charset="-78"/>
+                <a:ea typeface="Amiri" pitchFamily="2" charset="-78"/>
                 <a:cs typeface="Amiri" pitchFamily="2" charset="-78"/>
               </a:rPr>
               <a:t>يُوجَدُ … وَتُوجَدُ …</a:t>
@@ -44502,6 +44782,7 @@
                   <a:srgbClr val="1B3B6F"/>
                 </a:solidFill>
                 <a:latin typeface="Amiri" pitchFamily="2" charset="-78"/>
+                <a:ea typeface="Amiri" pitchFamily="2" charset="-78"/>
                 <a:cs typeface="Amiri" pitchFamily="2" charset="-78"/>
               </a:rPr>
               <a:t>مَاذَا يُوجَدُ فِيهِ؟</a:t>
@@ -44670,6 +44951,7 @@
                   <a:srgbClr val="1B3B6F"/>
                 </a:solidFill>
                 <a:latin typeface="Amiri" pitchFamily="2" charset="-78"/>
+                <a:ea typeface="Amiri" pitchFamily="2" charset="-78"/>
                 <a:cs typeface="Amiri" pitchFamily="2" charset="-78"/>
               </a:rPr>
               <a:t>هٰذِهِ الشَّاشَةُ الَّتِي …</a:t>
@@ -44746,6 +45028,7 @@
                   <a:srgbClr val="1B3B6F"/>
                 </a:solidFill>
                 <a:latin typeface="Amiri" pitchFamily="2" charset="-78"/>
+                <a:ea typeface="Amiri" pitchFamily="2" charset="-78"/>
                 <a:cs typeface="Amiri" pitchFamily="2" charset="-78"/>
               </a:rPr>
               <a:t>وَهٰذِهِ الشَّاشَةُ؟</a:t>
@@ -44849,6 +45132,7 @@
                   <a:srgbClr val="1B3B6F"/>
                 </a:solidFill>
                 <a:latin typeface="Amiri" pitchFamily="2" charset="-78"/>
+                <a:ea typeface="Amiri" pitchFamily="2" charset="-78"/>
                 <a:cs typeface="Amiri" pitchFamily="2" charset="-78"/>
               </a:rPr>
               <a:t>لَا، … مَمْنُوعَةٌ، لٰكِنْ …</a:t>
@@ -44925,6 +45209,7 @@
                   <a:srgbClr val="1B3B6F"/>
                 </a:solidFill>
                 <a:latin typeface="Amiri" pitchFamily="2" charset="-78"/>
+                <a:ea typeface="Amiri" pitchFamily="2" charset="-78"/>
                 <a:cs typeface="Amiri" pitchFamily="2" charset="-78"/>
               </a:rPr>
               <a:t>هَلْ تَسْتَخْدِمُونَ الهَوَاتِفَ فِي الحِصَّةِ؟</a:t>
@@ -45028,6 +45313,7 @@
                   <a:srgbClr val="1B3B6F"/>
                 </a:solidFill>
                 <a:latin typeface="Amiri" pitchFamily="2" charset="-78"/>
+                <a:ea typeface="Amiri" pitchFamily="2" charset="-78"/>
                 <a:cs typeface="Amiri" pitchFamily="2" charset="-78"/>
               </a:rPr>
               <a:t>نَعَمْ، … وَأَنْتَ، هَلْ …؟</a:t>
@@ -45104,6 +45390,7 @@
                   <a:srgbClr val="1B3B6F"/>
                 </a:solidFill>
                 <a:latin typeface="Amiri" pitchFamily="2" charset="-78"/>
+                <a:ea typeface="Amiri" pitchFamily="2" charset="-78"/>
                 <a:cs typeface="Amiri" pitchFamily="2" charset="-78"/>
               </a:rPr>
               <a:t>هَلْ يُعْجِبُكَ هٰذَا الفَصْلُ؟</a:t>
@@ -45278,13 +45565,9 @@
     <a:fontScheme name="Office">
       <a:majorFont>
         <a:latin typeface="Calibri Light" panose="020F0302020204030204"/>
-        <a:ea typeface=""/>
-        <a:cs typeface=""/>
-        <a:font script="Jpan" typeface="游ゴシック Light"/>
-        <a:font script="Hang" typeface="맑은 고딕"/>
-        <a:font script="Hans" typeface="等线 Light"/>
-        <a:font script="Hant" typeface="新細明體"/>
-        <a:font script="Arab" typeface="Times New Roman"/>
+        <a:ea typeface="Amiri" pitchFamily="2" charset="-78"/>
+        <a:cs typeface="Amiri" pitchFamily="2" charset="-78"/>
+        <a:font script="Arab" typeface="Amiri"/>
         <a:font script="Hebr" typeface="Times New Roman"/>
         <a:font script="Thai" typeface="Angsana New"/>
         <a:font script="Ethi" typeface="Nyala"/>
@@ -45330,13 +45613,9 @@
       </a:majorFont>
       <a:minorFont>
         <a:latin typeface="Calibri" panose="020F0502020204030204"/>
-        <a:ea typeface=""/>
-        <a:cs typeface=""/>
-        <a:font script="Jpan" typeface="游ゴシック"/>
-        <a:font script="Hang" typeface="맑은 고딕"/>
-        <a:font script="Hans" typeface="等线"/>
-        <a:font script="Hant" typeface="新細明體"/>
-        <a:font script="Arab" typeface="Arial"/>
+        <a:ea typeface="Amiri" pitchFamily="2" charset="-78"/>
+        <a:cs typeface="Amiri" pitchFamily="2" charset="-78"/>
+        <a:font script="Arab" typeface="Amiri"/>
         <a:font script="Hebr" typeface="Arial"/>
         <a:font script="Thai" typeface="Cordia New"/>
         <a:font script="Ethi" typeface="Nyala"/>
